--- a/pythonpra/myproject/ppt/assistant_devlog_v7.pptx
+++ b/pythonpra/myproject/ppt/assistant_devlog_v7.pptx
@@ -4,6 +4,9 @@
   <p:sldMasterIdLst>
     <p:sldMasterId id="2147483648" r:id="rId1"/>
   </p:sldMasterIdLst>
+  <p:notesMasterIdLst>
+    <p:notesMasterId r:id="rId14"/>
+  </p:notesMasterIdLst>
   <p:sldIdLst>
     <p:sldId id="256" r:id="rId2"/>
     <p:sldId id="257" r:id="rId3"/>
@@ -18,9 +21,6 @@
     <p:sldId id="266" r:id="rId12"/>
     <p:sldId id="267" r:id="rId13"/>
   </p:sldIdLst>
-  <p:notesMasterIdLst>
-    <p:notesMasterId r:id="rId14"/>
-  </p:notesMasterIdLst>
   <p:sldSz cx="12192000" cy="6858000"/>
   <p:notesSz cx="6858000" cy="12192000"/>
   <p:defaultTextStyle>
@@ -115,6 +115,11 @@
       </a:defRPr>
     </a:lvl9pPr>
   </p:defaultTextStyle>
+  <p:extLst>
+    <p:ext uri="{EFAFB233-063F-42B5-8137-9DF3F51BA10A}">
+      <p15:sldGuideLst xmlns:p15="http://schemas.microsoft.com/office/powerpoint/2012/main"/>
+    </p:ext>
+  </p:extLst>
 </p:presentation>
 </file>
 
@@ -140,240 +145,16 @@
           <a:chExt cx="0" cy="0"/>
         </a:xfrm>
       </p:grpSpPr>
-      <p:sp>
-        <p:nvSpPr>
-          <p:cNvPr id="2" name="Header Placeholder 1"/>
-          <p:cNvSpPr>
-            <a:spLocks noGrp="1"/>
-          </p:cNvSpPr>
-          <p:nvPr>
-            <p:ph type="hdr" sz="quarter"/>
-          </p:nvPr>
-        </p:nvSpPr>
-        <p:spPr>
-          <a:xfrm>
-            <a:off x="0" y="0"/>
-            <a:ext cx="2971800" cy="458788"/>
-          </a:xfrm>
-          <a:prstGeom prst="rect">
-            <a:avLst/>
-          </a:prstGeom>
-        </p:spPr>
-        <p:txBody>
-          <a:bodyPr vert="horz" lIns="91440" tIns="45720" rIns="91440" bIns="45720" rtlCol="0"/>
-          <a:lstStyle>
-            <a:lvl1pPr algn="l">
-              <a:defRPr sz="1200"/>
-            </a:lvl1pPr>
-          </a:lstStyle>
-          <a:p>
-            <a:endParaRPr lang="en-US"/>
-          </a:p>
-        </p:txBody>
-      </p:sp>
-      <p:sp>
-        <p:nvSpPr>
-          <p:cNvPr id="3" name="Date Placeholder 2"/>
-          <p:cNvSpPr>
-            <a:spLocks noGrp="1"/>
-          </p:cNvSpPr>
-          <p:nvPr>
-            <p:ph type="dt" idx="1"/>
-          </p:nvPr>
-        </p:nvSpPr>
-        <p:spPr>
-          <a:xfrm>
-            <a:off x="3884613" y="0"/>
-            <a:ext cx="2971800" cy="458788"/>
-          </a:xfrm>
-          <a:prstGeom prst="rect">
-            <a:avLst/>
-          </a:prstGeom>
-        </p:spPr>
-        <p:txBody>
-          <a:bodyPr vert="horz" lIns="91440" tIns="45720" rIns="91440" bIns="45720" rtlCol="0"/>
-          <a:lstStyle>
-            <a:lvl1pPr algn="r">
-              <a:defRPr sz="1200"/>
-            </a:lvl1pPr>
-          </a:lstStyle>
-          <a:p>
-            <a:fld id="{5282F153-3F37-0F45-9E97-73ACFA13230C}" type="datetimeFigureOut">
-              <a:rPr lang="en-US"/>
-              <a:t>7/23/19</a:t>
-            </a:fld>
-            <a:endParaRPr lang="en-US"/>
-          </a:p>
-        </p:txBody>
-      </p:sp>
-      <p:sp>
-        <p:nvSpPr>
-          <p:cNvPr id="4" name="Slide Image Placeholder 3"/>
-          <p:cNvSpPr>
-            <a:spLocks noGrp="1" noRot="1" noChangeAspect="1"/>
-          </p:cNvSpPr>
-          <p:nvPr>
-            <p:ph type="sldImg" idx="2"/>
-          </p:nvPr>
-        </p:nvSpPr>
-        <p:spPr>
-          <a:xfrm>
-            <a:off x="685800" y="1143000"/>
-            <a:ext cx="5486400" cy="3086100"/>
-          </a:xfrm>
-          <a:prstGeom prst="rect">
-            <a:avLst/>
-          </a:prstGeom>
-          <a:noFill/>
-          <a:ln w="12700">
-            <a:solidFill>
-              <a:prstClr val="black"/>
-            </a:solidFill>
-          </a:ln>
-        </p:spPr>
-        <p:txBody>
-          <a:bodyPr vert="horz" lIns="91440" tIns="45720" rIns="91440" bIns="45720" rtlCol="0" anchor="ctr"/>
-          <a:lstStyle/>
-          <a:p>
-            <a:endParaRPr lang="en-US"/>
-          </a:p>
-        </p:txBody>
-      </p:sp>
-      <p:sp>
-        <p:nvSpPr>
-          <p:cNvPr id="5" name="Notes Placeholder 4"/>
-          <p:cNvSpPr>
-            <a:spLocks noGrp="1"/>
-          </p:cNvSpPr>
-          <p:nvPr>
-            <p:ph type="body" sz="quarter" idx="3"/>
-          </p:nvPr>
-        </p:nvSpPr>
-        <p:spPr>
-          <a:xfrm>
-            <a:off x="685800" y="4400550"/>
-            <a:ext cx="5486400" cy="3600450"/>
-          </a:xfrm>
-          <a:prstGeom prst="rect">
-            <a:avLst/>
-          </a:prstGeom>
-        </p:spPr>
-        <p:txBody>
-          <a:bodyPr vert="horz" lIns="91440" tIns="45720" rIns="91440" bIns="45720" rtlCol="0"/>
-          <a:lstStyle/>
-          <a:p>
-            <a:pPr lvl="0"/>
-            <a:r>
-              <a:rPr lang="en-US"/>
-              <a:t>Click to edit Master text styles</a:t>
-            </a:r>
-          </a:p>
-          <a:p>
-            <a:pPr lvl="1"/>
-            <a:r>
-              <a:rPr lang="en-US"/>
-              <a:t>Second level</a:t>
-            </a:r>
-          </a:p>
-          <a:p>
-            <a:pPr lvl="2"/>
-            <a:r>
-              <a:rPr lang="en-US"/>
-              <a:t>Third level</a:t>
-            </a:r>
-          </a:p>
-          <a:p>
-            <a:pPr lvl="3"/>
-            <a:r>
-              <a:rPr lang="en-US"/>
-              <a:t>Fourth level</a:t>
-            </a:r>
-          </a:p>
-          <a:p>
-            <a:pPr lvl="4"/>
-            <a:r>
-              <a:rPr lang="en-US"/>
-              <a:t>Fifth level</a:t>
-            </a:r>
-          </a:p>
-        </p:txBody>
-      </p:sp>
-      <p:sp>
-        <p:nvSpPr>
-          <p:cNvPr id="6" name="Footer Placeholder 5"/>
-          <p:cNvSpPr>
-            <a:spLocks noGrp="1"/>
-          </p:cNvSpPr>
-          <p:nvPr>
-            <p:ph type="ftr" sz="quarter" idx="4"/>
-          </p:nvPr>
-        </p:nvSpPr>
-        <p:spPr>
-          <a:xfrm>
-            <a:off x="0" y="8685213"/>
-            <a:ext cx="2971800" cy="458787"/>
-          </a:xfrm>
-          <a:prstGeom prst="rect">
-            <a:avLst/>
-          </a:prstGeom>
-        </p:spPr>
-        <p:txBody>
-          <a:bodyPr vert="horz" lIns="91440" tIns="45720" rIns="91440" bIns="45720" rtlCol="0" anchor="b"/>
-          <a:lstStyle>
-            <a:lvl1pPr algn="l">
-              <a:defRPr sz="1200"/>
-            </a:lvl1pPr>
-          </a:lstStyle>
-          <a:p>
-            <a:endParaRPr lang="en-US"/>
-          </a:p>
-        </p:txBody>
-      </p:sp>
-      <p:sp>
-        <p:nvSpPr>
-          <p:cNvPr id="7" name="Slide Number Placeholder 6"/>
-          <p:cNvSpPr>
-            <a:spLocks noGrp="1"/>
-          </p:cNvSpPr>
-          <p:nvPr>
-            <p:ph type="sldNum" sz="quarter" idx="5"/>
-          </p:nvPr>
-        </p:nvSpPr>
-        <p:spPr>
-          <a:xfrm>
-            <a:off x="3884613" y="8685213"/>
-            <a:ext cx="2971800" cy="458787"/>
-          </a:xfrm>
-          <a:prstGeom prst="rect">
-            <a:avLst/>
-          </a:prstGeom>
-        </p:spPr>
-        <p:txBody>
-          <a:bodyPr vert="horz" lIns="91440" tIns="45720" rIns="91440" bIns="45720" rtlCol="0" anchor="b"/>
-          <a:lstStyle>
-            <a:lvl1pPr algn="r">
-              <a:defRPr sz="1200"/>
-            </a:lvl1pPr>
-          </a:lstStyle>
-          <a:p>
-            <a:fld id="{CE5E9CC1-C706-0F49-92D6-E571CC5EEA8F}" type="slidenum">
-              <a:rPr lang="en-US"/>
-              <a:t>‹#›</a:t>
-            </a:fld>
-            <a:endParaRPr lang="en-US"/>
-          </a:p>
-        </p:txBody>
-      </p:sp>
     </p:spTree>
     <p:extLst>
       <p:ext uri="{BB962C8B-B14F-4D97-AF65-F5344CB8AC3E}">
-        <p14:creationId xmlns:p14="http://schemas.microsoft.com/office/powerpoint/2010/main" val="1024086991"/>
+        <p14:creationId xmlns:p14="http://schemas.microsoft.com/office/powerpoint/2010/main" val="969939471"/>
       </p:ext>
     </p:extLst>
   </p:cSld>
   <p:clrMap bg1="lt1" tx1="dk1" bg2="lt2" tx2="dk2" accent1="accent1" accent2="accent2" accent3="accent3" accent4="accent4" accent5="accent5" accent6="accent6" hlink="hlink" folHlink="folHlink"/>
   <p:notesStyle>
-    <a:lvl1pPr marL="0" algn="l" defTabSz="914400" rtl="0" eaLnBrk="1" latinLnBrk="0" hangingPunct="1">
+    <a:lvl1pPr marL="0" algn="l" defTabSz="914400" rtl="0" eaLnBrk="1" latinLnBrk="1" hangingPunct="1">
       <a:defRPr sz="1200" kern="1200">
         <a:solidFill>
           <a:schemeClr val="tx1"/>
@@ -383,7 +164,7 @@
         <a:cs typeface="+mn-cs"/>
       </a:defRPr>
     </a:lvl1pPr>
-    <a:lvl2pPr marL="457200" algn="l" defTabSz="914400" rtl="0" eaLnBrk="1" latinLnBrk="0" hangingPunct="1">
+    <a:lvl2pPr marL="457200" algn="l" defTabSz="914400" rtl="0" eaLnBrk="1" latinLnBrk="1" hangingPunct="1">
       <a:defRPr sz="1200" kern="1200">
         <a:solidFill>
           <a:schemeClr val="tx1"/>
@@ -393,7 +174,7 @@
         <a:cs typeface="+mn-cs"/>
       </a:defRPr>
     </a:lvl2pPr>
-    <a:lvl3pPr marL="914400" algn="l" defTabSz="914400" rtl="0" eaLnBrk="1" latinLnBrk="0" hangingPunct="1">
+    <a:lvl3pPr marL="914400" algn="l" defTabSz="914400" rtl="0" eaLnBrk="1" latinLnBrk="1" hangingPunct="1">
       <a:defRPr sz="1200" kern="1200">
         <a:solidFill>
           <a:schemeClr val="tx1"/>
@@ -403,7 +184,7 @@
         <a:cs typeface="+mn-cs"/>
       </a:defRPr>
     </a:lvl3pPr>
-    <a:lvl4pPr marL="1371600" algn="l" defTabSz="914400" rtl="0" eaLnBrk="1" latinLnBrk="0" hangingPunct="1">
+    <a:lvl4pPr marL="1371600" algn="l" defTabSz="914400" rtl="0" eaLnBrk="1" latinLnBrk="1" hangingPunct="1">
       <a:defRPr sz="1200" kern="1200">
         <a:solidFill>
           <a:schemeClr val="tx1"/>
@@ -413,7 +194,7 @@
         <a:cs typeface="+mn-cs"/>
       </a:defRPr>
     </a:lvl4pPr>
-    <a:lvl5pPr marL="1828800" algn="l" defTabSz="914400" rtl="0" eaLnBrk="1" latinLnBrk="0" hangingPunct="1">
+    <a:lvl5pPr marL="1828800" algn="l" defTabSz="914400" rtl="0" eaLnBrk="1" latinLnBrk="1" hangingPunct="1">
       <a:defRPr sz="1200" kern="1200">
         <a:solidFill>
           <a:schemeClr val="tx1"/>
@@ -423,7 +204,7 @@
         <a:cs typeface="+mn-cs"/>
       </a:defRPr>
     </a:lvl5pPr>
-    <a:lvl6pPr marL="2286000" algn="l" defTabSz="914400" rtl="0" eaLnBrk="1" latinLnBrk="0" hangingPunct="1">
+    <a:lvl6pPr marL="2286000" algn="l" defTabSz="914400" rtl="0" eaLnBrk="1" latinLnBrk="1" hangingPunct="1">
       <a:defRPr sz="1200" kern="1200">
         <a:solidFill>
           <a:schemeClr val="tx1"/>
@@ -433,7 +214,7 @@
         <a:cs typeface="+mn-cs"/>
       </a:defRPr>
     </a:lvl6pPr>
-    <a:lvl7pPr marL="2743200" algn="l" defTabSz="914400" rtl="0" eaLnBrk="1" latinLnBrk="0" hangingPunct="1">
+    <a:lvl7pPr marL="2743200" algn="l" defTabSz="914400" rtl="0" eaLnBrk="1" latinLnBrk="1" hangingPunct="1">
       <a:defRPr sz="1200" kern="1200">
         <a:solidFill>
           <a:schemeClr val="tx1"/>
@@ -443,7 +224,7 @@
         <a:cs typeface="+mn-cs"/>
       </a:defRPr>
     </a:lvl7pPr>
-    <a:lvl8pPr marL="3200400" algn="l" defTabSz="914400" rtl="0" eaLnBrk="1" latinLnBrk="0" hangingPunct="1">
+    <a:lvl8pPr marL="3200400" algn="l" defTabSz="914400" rtl="0" eaLnBrk="1" latinLnBrk="1" hangingPunct="1">
       <a:defRPr sz="1200" kern="1200">
         <a:solidFill>
           <a:schemeClr val="tx1"/>
@@ -453,7 +234,7 @@
         <a:cs typeface="+mn-cs"/>
       </a:defRPr>
     </a:lvl8pPr>
-    <a:lvl9pPr marL="3657600" algn="l" defTabSz="914400" rtl="0" eaLnBrk="1" latinLnBrk="0" hangingPunct="1">
+    <a:lvl9pPr marL="3657600" algn="l" defTabSz="914400" rtl="0" eaLnBrk="1" latinLnBrk="1" hangingPunct="1">
       <a:defRPr sz="1200" kern="1200">
         <a:solidFill>
           <a:schemeClr val="tx1"/>
@@ -511,10 +292,6 @@
           <a:bodyPr/>
           <a:lstStyle/>
           <a:p>
-            <a:r>
-              <a:rPr lang="en-US" dirty="0"/>
-              <a:t/>
-            </a:r>
             <a:endParaRPr lang="en-US" dirty="0"/>
           </a:p>
         </p:txBody>
@@ -599,10 +376,6 @@
           <a:bodyPr/>
           <a:lstStyle/>
           <a:p>
-            <a:r>
-              <a:rPr lang="en-US" dirty="0"/>
-              <a:t/>
-            </a:r>
             <a:endParaRPr lang="en-US" dirty="0"/>
           </a:p>
         </p:txBody>
@@ -687,10 +460,6 @@
           <a:bodyPr/>
           <a:lstStyle/>
           <a:p>
-            <a:r>
-              <a:rPr lang="en-US" dirty="0"/>
-              <a:t/>
-            </a:r>
             <a:endParaRPr lang="en-US" dirty="0"/>
           </a:p>
         </p:txBody>
@@ -775,10 +544,6 @@
           <a:bodyPr/>
           <a:lstStyle/>
           <a:p>
-            <a:r>
-              <a:rPr lang="en-US" dirty="0"/>
-              <a:t/>
-            </a:r>
             <a:endParaRPr lang="en-US" dirty="0"/>
           </a:p>
         </p:txBody>
@@ -863,10 +628,6 @@
           <a:bodyPr/>
           <a:lstStyle/>
           <a:p>
-            <a:r>
-              <a:rPr lang="en-US" dirty="0"/>
-              <a:t/>
-            </a:r>
             <a:endParaRPr lang="en-US" dirty="0"/>
           </a:p>
         </p:txBody>
@@ -951,10 +712,6 @@
           <a:bodyPr/>
           <a:lstStyle/>
           <a:p>
-            <a:r>
-              <a:rPr lang="en-US" dirty="0"/>
-              <a:t/>
-            </a:r>
             <a:endParaRPr lang="en-US" dirty="0"/>
           </a:p>
         </p:txBody>
@@ -1039,10 +796,6 @@
           <a:bodyPr/>
           <a:lstStyle/>
           <a:p>
-            <a:r>
-              <a:rPr lang="en-US" dirty="0"/>
-              <a:t/>
-            </a:r>
             <a:endParaRPr lang="en-US" dirty="0"/>
           </a:p>
         </p:txBody>
@@ -1127,10 +880,6 @@
           <a:bodyPr/>
           <a:lstStyle/>
           <a:p>
-            <a:r>
-              <a:rPr lang="en-US" dirty="0"/>
-              <a:t/>
-            </a:r>
             <a:endParaRPr lang="en-US" dirty="0"/>
           </a:p>
         </p:txBody>
@@ -1215,10 +964,6 @@
           <a:bodyPr/>
           <a:lstStyle/>
           <a:p>
-            <a:r>
-              <a:rPr lang="en-US" dirty="0"/>
-              <a:t/>
-            </a:r>
             <a:endParaRPr lang="en-US" dirty="0"/>
           </a:p>
         </p:txBody>
@@ -1303,10 +1048,6 @@
           <a:bodyPr/>
           <a:lstStyle/>
           <a:p>
-            <a:r>
-              <a:rPr lang="en-US" dirty="0"/>
-              <a:t/>
-            </a:r>
             <a:endParaRPr lang="en-US" dirty="0"/>
           </a:p>
         </p:txBody>
@@ -1391,10 +1132,6 @@
           <a:bodyPr/>
           <a:lstStyle/>
           <a:p>
-            <a:r>
-              <a:rPr lang="en-US" dirty="0"/>
-              <a:t/>
-            </a:r>
             <a:endParaRPr lang="en-US" dirty="0"/>
           </a:p>
         </p:txBody>
@@ -1479,10 +1216,6 @@
           <a:bodyPr/>
           <a:lstStyle/>
           <a:p>
-            <a:r>
-              <a:rPr lang="en-US" dirty="0"/>
-              <a:t/>
-            </a:r>
             <a:endParaRPr lang="en-US" dirty="0"/>
           </a:p>
         </p:txBody>
@@ -1556,6 +1289,11 @@
 <file path=ppt/slideMasters/slideMaster1.xml><?xml version="1.0" encoding="utf-8"?>
 <p:sldMaster xmlns:a="http://schemas.openxmlformats.org/drawingml/2006/main" xmlns:r="http://schemas.openxmlformats.org/officeDocument/2006/relationships" xmlns:p="http://schemas.openxmlformats.org/presentationml/2006/main">
   <p:cSld>
+    <p:bg>
+      <p:bgRef idx="1001">
+        <a:schemeClr val="bg1"/>
+      </p:bgRef>
+    </p:bg>
     <p:spTree>
       <p:nvGrpSpPr>
         <p:cNvPr id="1" name=""/>
@@ -1838,6 +1576,7 @@
         <a:solidFill>
           <a:srgbClr val="1B2230"/>
         </a:solidFill>
+        <a:effectLst/>
       </p:bgPr>
     </p:bg>
     <p:spTree>
@@ -1875,7 +1614,7 @@
           <a:bodyPr wrap="square" lIns="0" tIns="0" rIns="0" bIns="0" rtlCol="0" anchor="t"/>
           <a:lstStyle/>
           <a:p>
-            <a:pPr indent="0" marL="0">
+            <a:pPr marL="0" indent="0">
               <a:buNone/>
             </a:pPr>
             <a:r>
@@ -1914,7 +1653,7 @@
           <a:bodyPr wrap="square" lIns="0" tIns="0" rIns="0" bIns="0" rtlCol="0" anchor="t"/>
           <a:lstStyle/>
           <a:p>
-            <a:pPr indent="0" marL="0">
+            <a:pPr marL="0" indent="0">
               <a:buNone/>
             </a:pPr>
             <a:r>
@@ -1953,7 +1692,7 @@
           <a:bodyPr wrap="square" lIns="0" tIns="0" rIns="0" bIns="0" rtlCol="0" anchor="t"/>
           <a:lstStyle/>
           <a:p>
-            <a:pPr indent="0" marL="0">
+            <a:pPr marL="0" indent="0">
               <a:buNone/>
             </a:pPr>
             <a:r>
@@ -1987,6 +1726,7 @@
         <a:solidFill>
           <a:srgbClr val="F5F6F8"/>
         </a:solidFill>
+        <a:effectLst/>
       </p:bgPr>
     </p:bg>
     <p:spTree>
@@ -2024,7 +1764,7 @@
           <a:bodyPr wrap="square" lIns="0" tIns="0" rIns="0" bIns="0" rtlCol="0" anchor="t"/>
           <a:lstStyle/>
           <a:p>
-            <a:pPr indent="0" marL="0">
+            <a:pPr marL="0" indent="0">
               <a:buNone/>
             </a:pPr>
             <a:r>
@@ -2068,13 +1808,20 @@
             <a:prstDash val="solid"/>
           </a:ln>
           <a:effectLst>
-            <a:outerShdw sx="100000" sy="100000" kx="0" ky="0" algn="bl" rotWithShape="0" blurRad="76200" dist="25400" dir="5400000">
+            <a:outerShdw blurRad="76200" dist="25400" dir="5400000" algn="bl" rotWithShape="0">
               <a:srgbClr val="000000">
                 <a:alpha val="12000"/>
               </a:srgbClr>
             </a:outerShdw>
           </a:effectLst>
         </p:spPr>
+        <p:txBody>
+          <a:bodyPr/>
+          <a:lstStyle/>
+          <a:p>
+            <a:endParaRPr lang="ko-KR" altLang="en-US"/>
+          </a:p>
+        </p:txBody>
       </p:sp>
       <p:sp>
         <p:nvSpPr>
@@ -2097,7 +1844,7 @@
           <a:bodyPr wrap="square" lIns="0" tIns="0" rIns="0" bIns="0" rtlCol="0" anchor="t"/>
           <a:lstStyle/>
           <a:p>
-            <a:pPr indent="0" marL="0">
+            <a:pPr marL="0" indent="0">
               <a:spcAft>
                 <a:spcPts val="400"/>
               </a:spcAft>
@@ -2117,7 +1864,7 @@
             <a:endParaRPr lang="en-US" sz="1400" dirty="0"/>
           </a:p>
           <a:p>
-            <a:pPr indent="0" marL="0">
+            <a:pPr marL="0" indent="0">
               <a:spcAft>
                 <a:spcPts val="400"/>
               </a:spcAft>
@@ -2164,13 +1911,20 @@
             <a:prstDash val="solid"/>
           </a:ln>
           <a:effectLst>
-            <a:outerShdw sx="100000" sy="100000" kx="0" ky="0" algn="bl" rotWithShape="0" blurRad="76200" dist="25400" dir="5400000">
+            <a:outerShdw blurRad="76200" dist="25400" dir="5400000" algn="bl" rotWithShape="0">
               <a:srgbClr val="000000">
                 <a:alpha val="12000"/>
               </a:srgbClr>
             </a:outerShdw>
           </a:effectLst>
         </p:spPr>
+        <p:txBody>
+          <a:bodyPr/>
+          <a:lstStyle/>
+          <a:p>
+            <a:endParaRPr lang="ko-KR" altLang="en-US"/>
+          </a:p>
+        </p:txBody>
       </p:sp>
       <p:sp>
         <p:nvSpPr>
@@ -2193,7 +1947,7 @@
           <a:bodyPr wrap="square" lIns="0" tIns="0" rIns="0" bIns="0" rtlCol="0" anchor="t"/>
           <a:lstStyle/>
           <a:p>
-            <a:pPr indent="0" marL="0">
+            <a:pPr marL="0" indent="0">
               <a:spcAft>
                 <a:spcPts val="400"/>
               </a:spcAft>
@@ -2213,7 +1967,7 @@
             <a:endParaRPr lang="en-US" sz="1400" dirty="0"/>
           </a:p>
           <a:p>
-            <a:pPr indent="0" marL="0">
+            <a:pPr marL="0" indent="0">
               <a:spcAft>
                 <a:spcPts val="400"/>
               </a:spcAft>
@@ -2260,6 +2014,13 @@
             <a:prstDash val="solid"/>
           </a:ln>
         </p:spPr>
+        <p:txBody>
+          <a:bodyPr/>
+          <a:lstStyle/>
+          <a:p>
+            <a:endParaRPr lang="ko-KR" altLang="en-US"/>
+          </a:p>
+        </p:txBody>
       </p:sp>
       <p:sp>
         <p:nvSpPr>
@@ -2282,7 +2043,7 @@
           <a:bodyPr wrap="square" lIns="0" tIns="0" rIns="0" bIns="0" rtlCol="0" anchor="t"/>
           <a:lstStyle/>
           <a:p>
-            <a:pPr indent="0" marL="0">
+            <a:pPr marL="0" indent="0">
               <a:spcAft>
                 <a:spcPts val="400"/>
               </a:spcAft>
@@ -2302,7 +2063,7 @@
             <a:endParaRPr lang="en-US" sz="1400" dirty="0"/>
           </a:p>
           <a:p>
-            <a:pPr indent="0" marL="0">
+            <a:pPr marL="0" indent="0">
               <a:spcAft>
                 <a:spcPts val="400"/>
               </a:spcAft>
@@ -2349,6 +2110,13 @@
             <a:prstDash val="solid"/>
           </a:ln>
         </p:spPr>
+        <p:txBody>
+          <a:bodyPr/>
+          <a:lstStyle/>
+          <a:p>
+            <a:endParaRPr lang="ko-KR" altLang="en-US"/>
+          </a:p>
+        </p:txBody>
       </p:sp>
       <p:sp>
         <p:nvSpPr>
@@ -2371,7 +2139,7 @@
           <a:bodyPr wrap="square" lIns="0" tIns="0" rIns="0" bIns="0" rtlCol="0" anchor="t"/>
           <a:lstStyle/>
           <a:p>
-            <a:pPr indent="0" marL="0">
+            <a:pPr marL="0" indent="0">
               <a:buNone/>
             </a:pPr>
             <a:r>
@@ -2385,9 +2153,6 @@
               </a:rPr>
               <a:t>계기: </a:t>
             </a:r>
-            <a:pPr indent="0" marL="0">
-              <a:buNone/>
-            </a:pPr>
             <a:r>
               <a:rPr lang="en-US" sz="1600" dirty="0">
                 <a:solidFill>
@@ -2419,6 +2184,7 @@
         <a:solidFill>
           <a:srgbClr val="F5F6F8"/>
         </a:solidFill>
+        <a:effectLst/>
       </p:bgPr>
     </p:bg>
     <p:spTree>
@@ -2456,7 +2222,7 @@
           <a:bodyPr wrap="square" lIns="0" tIns="0" rIns="0" bIns="0" rtlCol="0" anchor="t"/>
           <a:lstStyle/>
           <a:p>
-            <a:pPr indent="0" marL="0">
+            <a:pPr marL="0" indent="0">
               <a:buNone/>
             </a:pPr>
             <a:r>
@@ -2500,13 +2266,20 @@
             <a:prstDash val="solid"/>
           </a:ln>
           <a:effectLst>
-            <a:outerShdw sx="100000" sy="100000" kx="0" ky="0" algn="bl" rotWithShape="0" blurRad="76200" dist="25400" dir="5400000">
+            <a:outerShdw blurRad="76200" dist="25400" dir="5400000" algn="bl" rotWithShape="0">
               <a:srgbClr val="000000">
                 <a:alpha val="12000"/>
               </a:srgbClr>
             </a:outerShdw>
           </a:effectLst>
         </p:spPr>
+        <p:txBody>
+          <a:bodyPr/>
+          <a:lstStyle/>
+          <a:p>
+            <a:endParaRPr lang="ko-KR" altLang="en-US"/>
+          </a:p>
+        </p:txBody>
       </p:sp>
       <p:sp>
         <p:nvSpPr>
@@ -2529,7 +2302,7 @@
           <a:bodyPr wrap="square" lIns="0" tIns="0" rIns="0" bIns="0" rtlCol="0" anchor="t"/>
           <a:lstStyle/>
           <a:p>
-            <a:pPr indent="0" marL="0">
+            <a:pPr marL="0" indent="0">
               <a:spcAft>
                 <a:spcPts val="400"/>
               </a:spcAft>
@@ -2549,7 +2322,7 @@
             <a:endParaRPr lang="en-US" sz="1400" dirty="0"/>
           </a:p>
           <a:p>
-            <a:pPr indent="0" marL="0">
+            <a:pPr marL="0" indent="0">
               <a:spcAft>
                 <a:spcPts val="400"/>
               </a:spcAft>
@@ -2596,13 +2369,20 @@
             <a:prstDash val="solid"/>
           </a:ln>
           <a:effectLst>
-            <a:outerShdw sx="100000" sy="100000" kx="0" ky="0" algn="bl" rotWithShape="0" blurRad="76200" dist="25400" dir="5400000">
+            <a:outerShdw blurRad="76200" dist="25400" dir="5400000" algn="bl" rotWithShape="0">
               <a:srgbClr val="000000">
                 <a:alpha val="12000"/>
               </a:srgbClr>
             </a:outerShdw>
           </a:effectLst>
         </p:spPr>
+        <p:txBody>
+          <a:bodyPr/>
+          <a:lstStyle/>
+          <a:p>
+            <a:endParaRPr lang="ko-KR" altLang="en-US"/>
+          </a:p>
+        </p:txBody>
       </p:sp>
       <p:sp>
         <p:nvSpPr>
@@ -2625,7 +2405,7 @@
           <a:bodyPr wrap="square" lIns="0" tIns="0" rIns="0" bIns="0" rtlCol="0" anchor="t"/>
           <a:lstStyle/>
           <a:p>
-            <a:pPr indent="0" marL="0">
+            <a:pPr marL="0" indent="0">
               <a:spcAft>
                 <a:spcPts val="400"/>
               </a:spcAft>
@@ -2645,7 +2425,7 @@
             <a:endParaRPr lang="en-US" sz="1400" dirty="0"/>
           </a:p>
           <a:p>
-            <a:pPr indent="0" marL="0">
+            <a:pPr marL="0" indent="0">
               <a:spcAft>
                 <a:spcPts val="400"/>
               </a:spcAft>
@@ -2692,6 +2472,13 @@
             <a:prstDash val="solid"/>
           </a:ln>
         </p:spPr>
+        <p:txBody>
+          <a:bodyPr/>
+          <a:lstStyle/>
+          <a:p>
+            <a:endParaRPr lang="ko-KR" altLang="en-US"/>
+          </a:p>
+        </p:txBody>
       </p:sp>
       <p:sp>
         <p:nvSpPr>
@@ -2714,7 +2501,7 @@
           <a:bodyPr wrap="square" lIns="0" tIns="0" rIns="0" bIns="0" rtlCol="0" anchor="t"/>
           <a:lstStyle/>
           <a:p>
-            <a:pPr indent="0" marL="0">
+            <a:pPr marL="0" indent="0">
               <a:spcAft>
                 <a:spcPts val="400"/>
               </a:spcAft>
@@ -2734,7 +2521,7 @@
             <a:endParaRPr lang="en-US" sz="1400" dirty="0"/>
           </a:p>
           <a:p>
-            <a:pPr indent="0" marL="0">
+            <a:pPr marL="0" indent="0">
               <a:spcAft>
                 <a:spcPts val="400"/>
               </a:spcAft>
@@ -2781,6 +2568,13 @@
             <a:prstDash val="solid"/>
           </a:ln>
         </p:spPr>
+        <p:txBody>
+          <a:bodyPr/>
+          <a:lstStyle/>
+          <a:p>
+            <a:endParaRPr lang="ko-KR" altLang="en-US"/>
+          </a:p>
+        </p:txBody>
       </p:sp>
       <p:sp>
         <p:nvSpPr>
@@ -2803,7 +2597,7 @@
           <a:bodyPr wrap="square" lIns="0" tIns="0" rIns="0" bIns="0" rtlCol="0" anchor="t"/>
           <a:lstStyle/>
           <a:p>
-            <a:pPr indent="0" marL="0">
+            <a:pPr marL="0" indent="0">
               <a:spcAft>
                 <a:spcPts val="400"/>
               </a:spcAft>
@@ -2823,7 +2617,7 @@
             <a:endParaRPr lang="en-US" sz="1400" dirty="0"/>
           </a:p>
           <a:p>
-            <a:pPr indent="0" marL="0">
+            <a:pPr marL="0" indent="0">
               <a:spcAft>
                 <a:spcPts val="400"/>
               </a:spcAft>
@@ -2870,6 +2664,13 @@
             <a:prstDash val="solid"/>
           </a:ln>
         </p:spPr>
+        <p:txBody>
+          <a:bodyPr/>
+          <a:lstStyle/>
+          <a:p>
+            <a:endParaRPr lang="ko-KR" altLang="en-US"/>
+          </a:p>
+        </p:txBody>
       </p:sp>
       <p:sp>
         <p:nvSpPr>
@@ -2892,7 +2693,7 @@
           <a:bodyPr wrap="square" lIns="0" tIns="0" rIns="0" bIns="0" rtlCol="0" anchor="t"/>
           <a:lstStyle/>
           <a:p>
-            <a:pPr indent="0" marL="0">
+            <a:pPr marL="0" indent="0">
               <a:buNone/>
             </a:pPr>
             <a:r>
@@ -2906,9 +2707,6 @@
               </a:rPr>
               <a:t>결국: </a:t>
             </a:r>
-            <a:pPr indent="0" marL="0">
-              <a:buNone/>
-            </a:pPr>
             <a:r>
               <a:rPr lang="en-US" sz="1600" dirty="0">
                 <a:solidFill>
@@ -2940,6 +2738,7 @@
         <a:solidFill>
           <a:srgbClr val="F5F6F8"/>
         </a:solidFill>
+        <a:effectLst/>
       </p:bgPr>
     </p:bg>
     <p:spTree>
@@ -2977,7 +2776,7 @@
           <a:bodyPr wrap="square" lIns="0" tIns="0" rIns="0" bIns="0" rtlCol="0" anchor="t"/>
           <a:lstStyle/>
           <a:p>
-            <a:pPr indent="0" marL="0">
+            <a:pPr marL="0" indent="0">
               <a:buNone/>
             </a:pPr>
             <a:r>
@@ -3021,13 +2820,20 @@
             <a:prstDash val="solid"/>
           </a:ln>
           <a:effectLst>
-            <a:outerShdw sx="100000" sy="100000" kx="0" ky="0" algn="bl" rotWithShape="0" blurRad="76200" dist="25400" dir="5400000">
+            <a:outerShdw blurRad="76200" dist="25400" dir="5400000" algn="bl" rotWithShape="0">
               <a:srgbClr val="000000">
                 <a:alpha val="12000"/>
               </a:srgbClr>
             </a:outerShdw>
           </a:effectLst>
         </p:spPr>
+        <p:txBody>
+          <a:bodyPr/>
+          <a:lstStyle/>
+          <a:p>
+            <a:endParaRPr lang="ko-KR" altLang="en-US"/>
+          </a:p>
+        </p:txBody>
       </p:sp>
       <p:sp>
         <p:nvSpPr>
@@ -3050,7 +2856,7 @@
           <a:bodyPr wrap="square" lIns="0" tIns="0" rIns="0" bIns="0" rtlCol="0" anchor="t"/>
           <a:lstStyle/>
           <a:p>
-            <a:pPr indent="0" marL="0">
+            <a:pPr marL="0" indent="0">
               <a:buNone/>
             </a:pPr>
             <a:r>
@@ -3089,7 +2895,7 @@
           <a:bodyPr wrap="square" lIns="0" tIns="0" rIns="0" bIns="0" rtlCol="0" anchor="t"/>
           <a:lstStyle/>
           <a:p>
-            <a:pPr indent="0" marL="0">
+            <a:pPr marL="0" indent="0">
               <a:spcAft>
                 <a:spcPts val="400"/>
               </a:spcAft>
@@ -3109,7 +2915,7 @@
             <a:endParaRPr lang="en-US" sz="1400" dirty="0"/>
           </a:p>
           <a:p>
-            <a:pPr indent="0" marL="0">
+            <a:pPr marL="0" indent="0">
               <a:spcAft>
                 <a:spcPts val="400"/>
               </a:spcAft>
@@ -3156,13 +2962,20 @@
             <a:prstDash val="solid"/>
           </a:ln>
           <a:effectLst>
-            <a:outerShdw sx="100000" sy="100000" kx="0" ky="0" algn="bl" rotWithShape="0" blurRad="76200" dist="25400" dir="5400000">
+            <a:outerShdw blurRad="76200" dist="25400" dir="5400000" algn="bl" rotWithShape="0">
               <a:srgbClr val="000000">
                 <a:alpha val="12000"/>
               </a:srgbClr>
             </a:outerShdw>
           </a:effectLst>
         </p:spPr>
+        <p:txBody>
+          <a:bodyPr/>
+          <a:lstStyle/>
+          <a:p>
+            <a:endParaRPr lang="ko-KR" altLang="en-US"/>
+          </a:p>
+        </p:txBody>
       </p:sp>
       <p:sp>
         <p:nvSpPr>
@@ -3185,7 +2998,7 @@
           <a:bodyPr wrap="square" lIns="0" tIns="0" rIns="0" bIns="0" rtlCol="0" anchor="t"/>
           <a:lstStyle/>
           <a:p>
-            <a:pPr indent="0" marL="0">
+            <a:pPr marL="0" indent="0">
               <a:buNone/>
             </a:pPr>
             <a:r>
@@ -3224,7 +3037,7 @@
           <a:bodyPr wrap="square" lIns="0" tIns="0" rIns="0" bIns="0" rtlCol="0" anchor="t"/>
           <a:lstStyle/>
           <a:p>
-            <a:pPr indent="0" marL="0">
+            <a:pPr marL="0" indent="0">
               <a:spcAft>
                 <a:spcPts val="400"/>
               </a:spcAft>
@@ -3244,7 +3057,7 @@
             <a:endParaRPr lang="en-US" sz="1400" dirty="0"/>
           </a:p>
           <a:p>
-            <a:pPr indent="0" marL="0">
+            <a:pPr marL="0" indent="0">
               <a:spcAft>
                 <a:spcPts val="400"/>
               </a:spcAft>
@@ -3291,13 +3104,20 @@
             <a:prstDash val="solid"/>
           </a:ln>
           <a:effectLst>
-            <a:outerShdw sx="100000" sy="100000" kx="0" ky="0" algn="bl" rotWithShape="0" blurRad="76200" dist="25400" dir="5400000">
+            <a:outerShdw blurRad="76200" dist="25400" dir="5400000" algn="bl" rotWithShape="0">
               <a:srgbClr val="000000">
                 <a:alpha val="12000"/>
               </a:srgbClr>
             </a:outerShdw>
           </a:effectLst>
         </p:spPr>
+        <p:txBody>
+          <a:bodyPr/>
+          <a:lstStyle/>
+          <a:p>
+            <a:endParaRPr lang="ko-KR" altLang="en-US"/>
+          </a:p>
+        </p:txBody>
       </p:sp>
       <p:sp>
         <p:nvSpPr>
@@ -3320,7 +3140,7 @@
           <a:bodyPr wrap="square" lIns="0" tIns="0" rIns="0" bIns="0" rtlCol="0" anchor="t"/>
           <a:lstStyle/>
           <a:p>
-            <a:pPr indent="0" marL="0">
+            <a:pPr marL="0" indent="0">
               <a:buNone/>
             </a:pPr>
             <a:r>
@@ -3359,7 +3179,7 @@
           <a:bodyPr wrap="square" lIns="0" tIns="0" rIns="0" bIns="0" rtlCol="0" anchor="t"/>
           <a:lstStyle/>
           <a:p>
-            <a:pPr indent="0" marL="0">
+            <a:pPr marL="0" indent="0">
               <a:spcAft>
                 <a:spcPts val="400"/>
               </a:spcAft>
@@ -3379,7 +3199,7 @@
             <a:endParaRPr lang="en-US" sz="1400" dirty="0"/>
           </a:p>
           <a:p>
-            <a:pPr indent="0" marL="0">
+            <a:pPr marL="0" indent="0">
               <a:spcAft>
                 <a:spcPts val="400"/>
               </a:spcAft>
@@ -3426,13 +3246,20 @@
             <a:prstDash val="solid"/>
           </a:ln>
           <a:effectLst>
-            <a:outerShdw sx="100000" sy="100000" kx="0" ky="0" algn="bl" rotWithShape="0" blurRad="76200" dist="25400" dir="5400000">
+            <a:outerShdw blurRad="76200" dist="25400" dir="5400000" algn="bl" rotWithShape="0">
               <a:srgbClr val="000000">
                 <a:alpha val="12000"/>
               </a:srgbClr>
             </a:outerShdw>
           </a:effectLst>
         </p:spPr>
+        <p:txBody>
+          <a:bodyPr/>
+          <a:lstStyle/>
+          <a:p>
+            <a:endParaRPr lang="ko-KR" altLang="en-US"/>
+          </a:p>
+        </p:txBody>
       </p:sp>
       <p:sp>
         <p:nvSpPr>
@@ -3455,7 +3282,7 @@
           <a:bodyPr wrap="square" lIns="0" tIns="0" rIns="0" bIns="0" rtlCol="0" anchor="t"/>
           <a:lstStyle/>
           <a:p>
-            <a:pPr indent="0" marL="0">
+            <a:pPr marL="0" indent="0">
               <a:buNone/>
             </a:pPr>
             <a:r>
@@ -3494,7 +3321,7 @@
           <a:bodyPr wrap="square" lIns="0" tIns="0" rIns="0" bIns="0" rtlCol="0" anchor="t"/>
           <a:lstStyle/>
           <a:p>
-            <a:pPr indent="0" marL="0">
+            <a:pPr marL="0" indent="0">
               <a:spcAft>
                 <a:spcPts val="400"/>
               </a:spcAft>
@@ -3514,7 +3341,7 @@
             <a:endParaRPr lang="en-US" sz="1400" dirty="0"/>
           </a:p>
           <a:p>
-            <a:pPr indent="0" marL="0">
+            <a:pPr marL="0" indent="0">
               <a:spcAft>
                 <a:spcPts val="400"/>
               </a:spcAft>
@@ -3551,6 +3378,7 @@
         <a:solidFill>
           <a:srgbClr val="F5F6F8"/>
         </a:solidFill>
+        <a:effectLst/>
       </p:bgPr>
     </p:bg>
     <p:spTree>
@@ -3588,7 +3416,7 @@
           <a:bodyPr wrap="square" lIns="0" tIns="0" rIns="0" bIns="0" rtlCol="0" anchor="t"/>
           <a:lstStyle/>
           <a:p>
-            <a:pPr indent="0" marL="0">
+            <a:pPr marL="0" indent="0">
               <a:buNone/>
             </a:pPr>
             <a:r>
@@ -3632,6 +3460,13 @@
             <a:prstDash val="solid"/>
           </a:ln>
         </p:spPr>
+        <p:txBody>
+          <a:bodyPr/>
+          <a:lstStyle/>
+          <a:p>
+            <a:endParaRPr lang="ko-KR" altLang="en-US"/>
+          </a:p>
+        </p:txBody>
       </p:sp>
       <p:sp>
         <p:nvSpPr>
@@ -3654,7 +3489,7 @@
           <a:bodyPr wrap="square" lIns="0" tIns="0" rIns="0" bIns="0" rtlCol="0" anchor="ctr"/>
           <a:lstStyle/>
           <a:p>
-            <a:pPr algn="ctr" indent="0" marL="0">
+            <a:pPr marL="0" indent="0" algn="ctr">
               <a:buNone/>
             </a:pPr>
             <a:r>
@@ -3698,13 +3533,20 @@
             <a:prstDash val="solid"/>
           </a:ln>
           <a:effectLst>
-            <a:outerShdw sx="100000" sy="100000" kx="0" ky="0" algn="bl" rotWithShape="0" blurRad="76200" dist="25400" dir="5400000">
+            <a:outerShdw blurRad="76200" dist="25400" dir="5400000" algn="bl" rotWithShape="0">
               <a:srgbClr val="000000">
                 <a:alpha val="12000"/>
               </a:srgbClr>
             </a:outerShdw>
           </a:effectLst>
         </p:spPr>
+        <p:txBody>
+          <a:bodyPr/>
+          <a:lstStyle/>
+          <a:p>
+            <a:endParaRPr lang="ko-KR" altLang="en-US"/>
+          </a:p>
+        </p:txBody>
       </p:sp>
       <p:sp>
         <p:nvSpPr>
@@ -3727,7 +3569,7 @@
           <a:bodyPr wrap="square" lIns="0" tIns="0" rIns="0" bIns="0" rtlCol="0" anchor="ctr"/>
           <a:lstStyle/>
           <a:p>
-            <a:pPr indent="0" marL="0">
+            <a:pPr marL="0" indent="0">
               <a:buNone/>
             </a:pPr>
             <a:r>
@@ -3741,9 +3583,6 @@
               </a:rPr>
               <a:t>개요 · 흐름</a:t>
             </a:r>
-            <a:pPr indent="0" marL="0">
-              <a:buNone/>
-            </a:pPr>
             <a:r>
               <a:rPr lang="en-US" sz="1500" dirty="0">
                 <a:solidFill>
@@ -3780,7 +3619,7 @@
           <a:bodyPr wrap="square" lIns="0" tIns="0" rIns="0" bIns="0" rtlCol="0" anchor="ctr"/>
           <a:lstStyle/>
           <a:p>
-            <a:pPr algn="r" indent="0" marL="0">
+            <a:pPr marL="0" indent="0" algn="r">
               <a:buNone/>
             </a:pPr>
             <a:r>
@@ -3824,6 +3663,13 @@
             <a:prstDash val="solid"/>
           </a:ln>
         </p:spPr>
+        <p:txBody>
+          <a:bodyPr/>
+          <a:lstStyle/>
+          <a:p>
+            <a:endParaRPr lang="ko-KR" altLang="en-US"/>
+          </a:p>
+        </p:txBody>
       </p:sp>
       <p:sp>
         <p:nvSpPr>
@@ -3846,7 +3692,7 @@
           <a:bodyPr wrap="square" lIns="0" tIns="0" rIns="0" bIns="0" rtlCol="0" anchor="ctr"/>
           <a:lstStyle/>
           <a:p>
-            <a:pPr algn="ctr" indent="0" marL="0">
+            <a:pPr marL="0" indent="0" algn="ctr">
               <a:buNone/>
             </a:pPr>
             <a:r>
@@ -3890,13 +3736,20 @@
             <a:prstDash val="solid"/>
           </a:ln>
           <a:effectLst>
-            <a:outerShdw sx="100000" sy="100000" kx="0" ky="0" algn="bl" rotWithShape="0" blurRad="76200" dist="25400" dir="5400000">
+            <a:outerShdw blurRad="76200" dist="25400" dir="5400000" algn="bl" rotWithShape="0">
               <a:srgbClr val="000000">
                 <a:alpha val="12000"/>
               </a:srgbClr>
             </a:outerShdw>
           </a:effectLst>
         </p:spPr>
+        <p:txBody>
+          <a:bodyPr/>
+          <a:lstStyle/>
+          <a:p>
+            <a:endParaRPr lang="ko-KR" altLang="en-US"/>
+          </a:p>
+        </p:txBody>
       </p:sp>
       <p:sp>
         <p:nvSpPr>
@@ -3919,7 +3772,7 @@
           <a:bodyPr wrap="square" lIns="0" tIns="0" rIns="0" bIns="0" rtlCol="0" anchor="ctr"/>
           <a:lstStyle/>
           <a:p>
-            <a:pPr indent="0" marL="0">
+            <a:pPr marL="0" indent="0">
               <a:buNone/>
             </a:pPr>
             <a:r>
@@ -3933,9 +3786,6 @@
               </a:rPr>
               <a:t>손</a:t>
             </a:r>
-            <a:pPr indent="0" marL="0">
-              <a:buNone/>
-            </a:pPr>
             <a:r>
               <a:rPr lang="en-US" sz="1500" dirty="0">
                 <a:solidFill>
@@ -3972,7 +3822,7 @@
           <a:bodyPr wrap="square" lIns="0" tIns="0" rIns="0" bIns="0" rtlCol="0" anchor="ctr"/>
           <a:lstStyle/>
           <a:p>
-            <a:pPr algn="r" indent="0" marL="0">
+            <a:pPr marL="0" indent="0" algn="r">
               <a:buNone/>
             </a:pPr>
             <a:r>
@@ -4016,6 +3866,13 @@
             <a:prstDash val="solid"/>
           </a:ln>
         </p:spPr>
+        <p:txBody>
+          <a:bodyPr/>
+          <a:lstStyle/>
+          <a:p>
+            <a:endParaRPr lang="ko-KR" altLang="en-US"/>
+          </a:p>
+        </p:txBody>
       </p:sp>
       <p:sp>
         <p:nvSpPr>
@@ -4038,7 +3895,7 @@
           <a:bodyPr wrap="square" lIns="0" tIns="0" rIns="0" bIns="0" rtlCol="0" anchor="ctr"/>
           <a:lstStyle/>
           <a:p>
-            <a:pPr algn="ctr" indent="0" marL="0">
+            <a:pPr marL="0" indent="0" algn="ctr">
               <a:buNone/>
             </a:pPr>
             <a:r>
@@ -4082,13 +3939,20 @@
             <a:prstDash val="solid"/>
           </a:ln>
           <a:effectLst>
-            <a:outerShdw sx="100000" sy="100000" kx="0" ky="0" algn="bl" rotWithShape="0" blurRad="76200" dist="25400" dir="5400000">
+            <a:outerShdw blurRad="76200" dist="25400" dir="5400000" algn="bl" rotWithShape="0">
               <a:srgbClr val="000000">
                 <a:alpha val="12000"/>
               </a:srgbClr>
             </a:outerShdw>
           </a:effectLst>
         </p:spPr>
+        <p:txBody>
+          <a:bodyPr/>
+          <a:lstStyle/>
+          <a:p>
+            <a:endParaRPr lang="ko-KR" altLang="en-US"/>
+          </a:p>
+        </p:txBody>
       </p:sp>
       <p:sp>
         <p:nvSpPr>
@@ -4111,7 +3975,7 @@
           <a:bodyPr wrap="square" lIns="0" tIns="0" rIns="0" bIns="0" rtlCol="0" anchor="ctr"/>
           <a:lstStyle/>
           <a:p>
-            <a:pPr indent="0" marL="0">
+            <a:pPr marL="0" indent="0">
               <a:buNone/>
             </a:pPr>
             <a:r>
@@ -4125,9 +3989,6 @@
               </a:rPr>
               <a:t>눈</a:t>
             </a:r>
-            <a:pPr indent="0" marL="0">
-              <a:buNone/>
-            </a:pPr>
             <a:r>
               <a:rPr lang="en-US" sz="1500" dirty="0">
                 <a:solidFill>
@@ -4164,7 +4025,7 @@
           <a:bodyPr wrap="square" lIns="0" tIns="0" rIns="0" bIns="0" rtlCol="0" anchor="ctr"/>
           <a:lstStyle/>
           <a:p>
-            <a:pPr algn="r" indent="0" marL="0">
+            <a:pPr marL="0" indent="0" algn="r">
               <a:buNone/>
             </a:pPr>
             <a:r>
@@ -4208,6 +4069,13 @@
             <a:prstDash val="solid"/>
           </a:ln>
         </p:spPr>
+        <p:txBody>
+          <a:bodyPr/>
+          <a:lstStyle/>
+          <a:p>
+            <a:endParaRPr lang="ko-KR" altLang="en-US"/>
+          </a:p>
+        </p:txBody>
       </p:sp>
       <p:sp>
         <p:nvSpPr>
@@ -4230,7 +4098,7 @@
           <a:bodyPr wrap="square" lIns="0" tIns="0" rIns="0" bIns="0" rtlCol="0" anchor="ctr"/>
           <a:lstStyle/>
           <a:p>
-            <a:pPr algn="ctr" indent="0" marL="0">
+            <a:pPr marL="0" indent="0" algn="ctr">
               <a:buNone/>
             </a:pPr>
             <a:r>
@@ -4274,13 +4142,20 @@
             <a:prstDash val="solid"/>
           </a:ln>
           <a:effectLst>
-            <a:outerShdw sx="100000" sy="100000" kx="0" ky="0" algn="bl" rotWithShape="0" blurRad="76200" dist="25400" dir="5400000">
+            <a:outerShdw blurRad="76200" dist="25400" dir="5400000" algn="bl" rotWithShape="0">
               <a:srgbClr val="000000">
                 <a:alpha val="12000"/>
               </a:srgbClr>
             </a:outerShdw>
           </a:effectLst>
         </p:spPr>
+        <p:txBody>
+          <a:bodyPr/>
+          <a:lstStyle/>
+          <a:p>
+            <a:endParaRPr lang="ko-KR" altLang="en-US"/>
+          </a:p>
+        </p:txBody>
       </p:sp>
       <p:sp>
         <p:nvSpPr>
@@ -4303,7 +4178,7 @@
           <a:bodyPr wrap="square" lIns="0" tIns="0" rIns="0" bIns="0" rtlCol="0" anchor="ctr"/>
           <a:lstStyle/>
           <a:p>
-            <a:pPr indent="0" marL="0">
+            <a:pPr marL="0" indent="0">
               <a:buNone/>
             </a:pPr>
             <a:r>
@@ -4317,9 +4192,6 @@
               </a:rPr>
               <a:t>LLM · 음성</a:t>
             </a:r>
-            <a:pPr indent="0" marL="0">
-              <a:buNone/>
-            </a:pPr>
             <a:r>
               <a:rPr lang="en-US" sz="1500" dirty="0">
                 <a:solidFill>
@@ -4356,7 +4228,7 @@
           <a:bodyPr wrap="square" lIns="0" tIns="0" rIns="0" bIns="0" rtlCol="0" anchor="ctr"/>
           <a:lstStyle/>
           <a:p>
-            <a:pPr algn="r" indent="0" marL="0">
+            <a:pPr marL="0" indent="0" algn="r">
               <a:buNone/>
             </a:pPr>
             <a:r>
@@ -4400,6 +4272,13 @@
             <a:prstDash val="solid"/>
           </a:ln>
         </p:spPr>
+        <p:txBody>
+          <a:bodyPr/>
+          <a:lstStyle/>
+          <a:p>
+            <a:endParaRPr lang="ko-KR" altLang="en-US"/>
+          </a:p>
+        </p:txBody>
       </p:sp>
       <p:sp>
         <p:nvSpPr>
@@ -4422,7 +4301,7 @@
           <a:bodyPr wrap="square" lIns="0" tIns="0" rIns="0" bIns="0" rtlCol="0" anchor="ctr"/>
           <a:lstStyle/>
           <a:p>
-            <a:pPr algn="ctr" indent="0" marL="0">
+            <a:pPr marL="0" indent="0" algn="ctr">
               <a:buNone/>
             </a:pPr>
             <a:r>
@@ -4466,13 +4345,20 @@
             <a:prstDash val="solid"/>
           </a:ln>
           <a:effectLst>
-            <a:outerShdw sx="100000" sy="100000" kx="0" ky="0" algn="bl" rotWithShape="0" blurRad="76200" dist="25400" dir="5400000">
+            <a:outerShdw blurRad="76200" dist="25400" dir="5400000" algn="bl" rotWithShape="0">
               <a:srgbClr val="000000">
                 <a:alpha val="12000"/>
               </a:srgbClr>
             </a:outerShdw>
           </a:effectLst>
         </p:spPr>
+        <p:txBody>
+          <a:bodyPr/>
+          <a:lstStyle/>
+          <a:p>
+            <a:endParaRPr lang="ko-KR" altLang="en-US"/>
+          </a:p>
+        </p:txBody>
       </p:sp>
       <p:sp>
         <p:nvSpPr>
@@ -4495,7 +4381,7 @@
           <a:bodyPr wrap="square" lIns="0" tIns="0" rIns="0" bIns="0" rtlCol="0" anchor="ctr"/>
           <a:lstStyle/>
           <a:p>
-            <a:pPr indent="0" marL="0">
+            <a:pPr marL="0" indent="0">
               <a:buNone/>
             </a:pPr>
             <a:r>
@@ -4509,9 +4395,6 @@
               </a:rPr>
               <a:t>포즈 · 박수</a:t>
             </a:r>
-            <a:pPr indent="0" marL="0">
-              <a:buNone/>
-            </a:pPr>
             <a:r>
               <a:rPr lang="en-US" sz="1500" dirty="0">
                 <a:solidFill>
@@ -4548,7 +4431,7 @@
           <a:bodyPr wrap="square" lIns="0" tIns="0" rIns="0" bIns="0" rtlCol="0" anchor="ctr"/>
           <a:lstStyle/>
           <a:p>
-            <a:pPr algn="r" indent="0" marL="0">
+            <a:pPr marL="0" indent="0" algn="r">
               <a:buNone/>
             </a:pPr>
             <a:r>
@@ -4592,6 +4475,13 @@
             <a:prstDash val="solid"/>
           </a:ln>
         </p:spPr>
+        <p:txBody>
+          <a:bodyPr/>
+          <a:lstStyle/>
+          <a:p>
+            <a:endParaRPr lang="ko-KR" altLang="en-US"/>
+          </a:p>
+        </p:txBody>
       </p:sp>
       <p:sp>
         <p:nvSpPr>
@@ -4614,7 +4504,7 @@
           <a:bodyPr wrap="square" lIns="0" tIns="0" rIns="0" bIns="0" rtlCol="0" anchor="ctr"/>
           <a:lstStyle/>
           <a:p>
-            <a:pPr algn="ctr" indent="0" marL="0">
+            <a:pPr marL="0" indent="0" algn="ctr">
               <a:buNone/>
             </a:pPr>
             <a:r>
@@ -4658,13 +4548,20 @@
             <a:prstDash val="solid"/>
           </a:ln>
           <a:effectLst>
-            <a:outerShdw sx="100000" sy="100000" kx="0" ky="0" algn="bl" rotWithShape="0" blurRad="76200" dist="25400" dir="5400000">
+            <a:outerShdw blurRad="76200" dist="25400" dir="5400000" algn="bl" rotWithShape="0">
               <a:srgbClr val="000000">
                 <a:alpha val="12000"/>
               </a:srgbClr>
             </a:outerShdw>
           </a:effectLst>
         </p:spPr>
+        <p:txBody>
+          <a:bodyPr/>
+          <a:lstStyle/>
+          <a:p>
+            <a:endParaRPr lang="ko-KR" altLang="en-US"/>
+          </a:p>
+        </p:txBody>
       </p:sp>
       <p:sp>
         <p:nvSpPr>
@@ -4687,7 +4584,7 @@
           <a:bodyPr wrap="square" lIns="0" tIns="0" rIns="0" bIns="0" rtlCol="0" anchor="ctr"/>
           <a:lstStyle/>
           <a:p>
-            <a:pPr indent="0" marL="0">
+            <a:pPr marL="0" indent="0">
               <a:buNone/>
             </a:pPr>
             <a:r>
@@ -4701,9 +4598,6 @@
               </a:rPr>
               <a:t>교훈</a:t>
             </a:r>
-            <a:pPr indent="0" marL="0">
-              <a:buNone/>
-            </a:pPr>
             <a:r>
               <a:rPr lang="en-US" sz="1500" dirty="0">
                 <a:solidFill>
@@ -4740,7 +4634,7 @@
           <a:bodyPr wrap="square" lIns="0" tIns="0" rIns="0" bIns="0" rtlCol="0" anchor="ctr"/>
           <a:lstStyle/>
           <a:p>
-            <a:pPr algn="r" indent="0" marL="0">
+            <a:pPr marL="0" indent="0" algn="r">
               <a:buNone/>
             </a:pPr>
             <a:r>
@@ -4774,6 +4668,7 @@
         <a:solidFill>
           <a:srgbClr val="F5F6F8"/>
         </a:solidFill>
+        <a:effectLst/>
       </p:bgPr>
     </p:bg>
     <p:spTree>
@@ -4811,7 +4706,7 @@
           <a:bodyPr wrap="square" lIns="0" tIns="0" rIns="0" bIns="0" rtlCol="0" anchor="t"/>
           <a:lstStyle/>
           <a:p>
-            <a:pPr indent="0" marL="0">
+            <a:pPr marL="0" indent="0">
               <a:buNone/>
             </a:pPr>
             <a:r>
@@ -4855,13 +4750,20 @@
             <a:prstDash val="solid"/>
           </a:ln>
           <a:effectLst>
-            <a:outerShdw sx="100000" sy="100000" kx="0" ky="0" algn="bl" rotWithShape="0" blurRad="76200" dist="25400" dir="5400000">
+            <a:outerShdw blurRad="76200" dist="25400" dir="5400000" algn="bl" rotWithShape="0">
               <a:srgbClr val="000000">
                 <a:alpha val="12000"/>
               </a:srgbClr>
             </a:outerShdw>
           </a:effectLst>
         </p:spPr>
+        <p:txBody>
+          <a:bodyPr/>
+          <a:lstStyle/>
+          <a:p>
+            <a:endParaRPr lang="ko-KR" altLang="en-US"/>
+          </a:p>
+        </p:txBody>
       </p:sp>
       <p:sp>
         <p:nvSpPr>
@@ -4884,7 +4786,7 @@
           <a:bodyPr wrap="square" lIns="0" tIns="0" rIns="0" bIns="0" rtlCol="0" anchor="t"/>
           <a:lstStyle/>
           <a:p>
-            <a:pPr indent="0" marL="0">
+            <a:pPr marL="0" indent="0">
               <a:buNone/>
             </a:pPr>
             <a:r>
@@ -4923,7 +4825,7 @@
           <a:bodyPr wrap="square" lIns="0" tIns="0" rIns="0" bIns="0" rtlCol="0" anchor="t"/>
           <a:lstStyle/>
           <a:p>
-            <a:pPr indent="0" marL="0">
+            <a:pPr marL="0" indent="0">
               <a:buNone/>
             </a:pPr>
             <a:r>
@@ -4940,7 +4842,7 @@
             <a:endParaRPr lang="en-US" sz="1500" dirty="0"/>
           </a:p>
           <a:p>
-            <a:pPr indent="0" marL="0">
+            <a:pPr marL="0" indent="0">
               <a:buNone/>
             </a:pPr>
             <a:r>
@@ -4984,6 +4886,13 @@
             <a:prstDash val="solid"/>
           </a:ln>
         </p:spPr>
+        <p:txBody>
+          <a:bodyPr/>
+          <a:lstStyle/>
+          <a:p>
+            <a:endParaRPr lang="ko-KR" altLang="en-US"/>
+          </a:p>
+        </p:txBody>
       </p:sp>
       <p:sp>
         <p:nvSpPr>
@@ -5006,7 +4915,7 @@
           <a:bodyPr wrap="square" lIns="0" tIns="0" rIns="0" bIns="0" rtlCol="0" anchor="ctr"/>
           <a:lstStyle/>
           <a:p>
-            <a:pPr algn="ctr" indent="0" marL="0">
+            <a:pPr marL="0" indent="0" algn="ctr">
               <a:buNone/>
             </a:pPr>
             <a:r>
@@ -5050,13 +4959,20 @@
             <a:prstDash val="solid"/>
           </a:ln>
           <a:effectLst>
-            <a:outerShdw sx="100000" sy="100000" kx="0" ky="0" algn="bl" rotWithShape="0" blurRad="76200" dist="25400" dir="5400000">
+            <a:outerShdw blurRad="76200" dist="25400" dir="5400000" algn="bl" rotWithShape="0">
               <a:srgbClr val="000000">
                 <a:alpha val="12000"/>
               </a:srgbClr>
             </a:outerShdw>
           </a:effectLst>
         </p:spPr>
+        <p:txBody>
+          <a:bodyPr/>
+          <a:lstStyle/>
+          <a:p>
+            <a:endParaRPr lang="ko-KR" altLang="en-US"/>
+          </a:p>
+        </p:txBody>
       </p:sp>
       <p:sp>
         <p:nvSpPr>
@@ -5079,7 +4995,7 @@
           <a:bodyPr wrap="square" lIns="0" tIns="0" rIns="0" bIns="0" rtlCol="0" anchor="t"/>
           <a:lstStyle/>
           <a:p>
-            <a:pPr indent="0" marL="0">
+            <a:pPr marL="0" indent="0">
               <a:buNone/>
             </a:pPr>
             <a:r>
@@ -5118,7 +5034,7 @@
           <a:bodyPr wrap="square" lIns="0" tIns="0" rIns="0" bIns="0" rtlCol="0" anchor="t"/>
           <a:lstStyle/>
           <a:p>
-            <a:pPr indent="0" marL="0">
+            <a:pPr marL="0" indent="0">
               <a:buNone/>
             </a:pPr>
             <a:r>
@@ -5162,6 +5078,13 @@
             <a:prstDash val="solid"/>
           </a:ln>
         </p:spPr>
+        <p:txBody>
+          <a:bodyPr/>
+          <a:lstStyle/>
+          <a:p>
+            <a:endParaRPr lang="ko-KR" altLang="en-US"/>
+          </a:p>
+        </p:txBody>
       </p:sp>
       <p:sp>
         <p:nvSpPr>
@@ -5184,7 +5107,7 @@
           <a:bodyPr wrap="square" lIns="0" tIns="0" rIns="0" bIns="0" rtlCol="0" anchor="ctr"/>
           <a:lstStyle/>
           <a:p>
-            <a:pPr algn="ctr" indent="0" marL="0">
+            <a:pPr marL="0" indent="0" algn="ctr">
               <a:buNone/>
             </a:pPr>
             <a:r>
@@ -5228,13 +5151,20 @@
             <a:prstDash val="solid"/>
           </a:ln>
           <a:effectLst>
-            <a:outerShdw sx="100000" sy="100000" kx="0" ky="0" algn="bl" rotWithShape="0" blurRad="76200" dist="25400" dir="5400000">
+            <a:outerShdw blurRad="76200" dist="25400" dir="5400000" algn="bl" rotWithShape="0">
               <a:srgbClr val="000000">
                 <a:alpha val="12000"/>
               </a:srgbClr>
             </a:outerShdw>
           </a:effectLst>
         </p:spPr>
+        <p:txBody>
+          <a:bodyPr/>
+          <a:lstStyle/>
+          <a:p>
+            <a:endParaRPr lang="ko-KR" altLang="en-US"/>
+          </a:p>
+        </p:txBody>
       </p:sp>
       <p:sp>
         <p:nvSpPr>
@@ -5257,7 +5187,7 @@
           <a:bodyPr wrap="square" lIns="0" tIns="0" rIns="0" bIns="0" rtlCol="0" anchor="t"/>
           <a:lstStyle/>
           <a:p>
-            <a:pPr indent="0" marL="0">
+            <a:pPr marL="0" indent="0">
               <a:buNone/>
             </a:pPr>
             <a:r>
@@ -5296,7 +5226,7 @@
           <a:bodyPr wrap="square" lIns="0" tIns="0" rIns="0" bIns="0" rtlCol="0" anchor="t"/>
           <a:lstStyle/>
           <a:p>
-            <a:pPr indent="0" marL="0">
+            <a:pPr marL="0" indent="0">
               <a:buNone/>
             </a:pPr>
             <a:r>
@@ -5340,6 +5270,13 @@
             <a:prstDash val="solid"/>
           </a:ln>
         </p:spPr>
+        <p:txBody>
+          <a:bodyPr/>
+          <a:lstStyle/>
+          <a:p>
+            <a:endParaRPr lang="ko-KR" altLang="en-US"/>
+          </a:p>
+        </p:txBody>
       </p:sp>
       <p:sp>
         <p:nvSpPr>
@@ -5362,7 +5299,7 @@
           <a:bodyPr wrap="square" lIns="0" tIns="0" rIns="0" bIns="0" rtlCol="0" anchor="ctr"/>
           <a:lstStyle/>
           <a:p>
-            <a:pPr algn="ctr" indent="0" marL="0">
+            <a:pPr marL="0" indent="0" algn="ctr">
               <a:buNone/>
             </a:pPr>
             <a:r>
@@ -5406,13 +5343,20 @@
             <a:prstDash val="solid"/>
           </a:ln>
           <a:effectLst>
-            <a:outerShdw sx="100000" sy="100000" kx="0" ky="0" algn="bl" rotWithShape="0" blurRad="76200" dist="25400" dir="5400000">
+            <a:outerShdw blurRad="76200" dist="25400" dir="5400000" algn="bl" rotWithShape="0">
               <a:srgbClr val="000000">
                 <a:alpha val="12000"/>
               </a:srgbClr>
             </a:outerShdw>
           </a:effectLst>
         </p:spPr>
+        <p:txBody>
+          <a:bodyPr/>
+          <a:lstStyle/>
+          <a:p>
+            <a:endParaRPr lang="ko-KR" altLang="en-US"/>
+          </a:p>
+        </p:txBody>
       </p:sp>
       <p:sp>
         <p:nvSpPr>
@@ -5435,7 +5379,7 @@
           <a:bodyPr wrap="square" lIns="0" tIns="0" rIns="0" bIns="0" rtlCol="0" anchor="t"/>
           <a:lstStyle/>
           <a:p>
-            <a:pPr indent="0" marL="0">
+            <a:pPr marL="0" indent="0">
               <a:buNone/>
             </a:pPr>
             <a:r>
@@ -5474,7 +5418,7 @@
           <a:bodyPr wrap="square" lIns="0" tIns="0" rIns="0" bIns="0" rtlCol="0" anchor="t"/>
           <a:lstStyle/>
           <a:p>
-            <a:pPr indent="0" marL="0">
+            <a:pPr marL="0" indent="0">
               <a:buNone/>
             </a:pPr>
             <a:r>
@@ -5518,6 +5462,13 @@
             <a:prstDash val="solid"/>
           </a:ln>
         </p:spPr>
+        <p:txBody>
+          <a:bodyPr/>
+          <a:lstStyle/>
+          <a:p>
+            <a:endParaRPr lang="ko-KR" altLang="en-US"/>
+          </a:p>
+        </p:txBody>
       </p:sp>
       <p:sp>
         <p:nvSpPr>
@@ -5540,7 +5491,7 @@
           <a:bodyPr wrap="square" lIns="0" tIns="0" rIns="0" bIns="0" rtlCol="0" anchor="ctr"/>
           <a:lstStyle/>
           <a:p>
-            <a:pPr algn="ctr" indent="0" marL="0">
+            <a:pPr marL="0" indent="0" algn="ctr">
               <a:buNone/>
             </a:pPr>
             <a:r>
@@ -5584,13 +5535,20 @@
             <a:prstDash val="solid"/>
           </a:ln>
           <a:effectLst>
-            <a:outerShdw sx="100000" sy="100000" kx="0" ky="0" algn="bl" rotWithShape="0" blurRad="76200" dist="25400" dir="5400000">
+            <a:outerShdw blurRad="76200" dist="25400" dir="5400000" algn="bl" rotWithShape="0">
               <a:srgbClr val="000000">
                 <a:alpha val="12000"/>
               </a:srgbClr>
             </a:outerShdw>
           </a:effectLst>
         </p:spPr>
+        <p:txBody>
+          <a:bodyPr/>
+          <a:lstStyle/>
+          <a:p>
+            <a:endParaRPr lang="ko-KR" altLang="en-US"/>
+          </a:p>
+        </p:txBody>
       </p:sp>
       <p:sp>
         <p:nvSpPr>
@@ -5613,7 +5571,7 @@
           <a:bodyPr wrap="square" lIns="0" tIns="0" rIns="0" bIns="0" rtlCol="0" anchor="t"/>
           <a:lstStyle/>
           <a:p>
-            <a:pPr indent="0" marL="0">
+            <a:pPr marL="0" indent="0">
               <a:buNone/>
             </a:pPr>
             <a:r>
@@ -5652,7 +5610,7 @@
           <a:bodyPr wrap="square" lIns="0" tIns="0" rIns="0" bIns="0" rtlCol="0" anchor="t"/>
           <a:lstStyle/>
           <a:p>
-            <a:pPr indent="0" marL="0">
+            <a:pPr marL="0" indent="0">
               <a:buNone/>
             </a:pPr>
             <a:r>
@@ -5696,6 +5654,13 @@
             <a:prstDash val="solid"/>
           </a:ln>
         </p:spPr>
+        <p:txBody>
+          <a:bodyPr/>
+          <a:lstStyle/>
+          <a:p>
+            <a:endParaRPr lang="ko-KR" altLang="en-US"/>
+          </a:p>
+        </p:txBody>
       </p:sp>
       <p:sp>
         <p:nvSpPr>
@@ -5718,7 +5683,7 @@
           <a:bodyPr wrap="square" lIns="0" tIns="0" rIns="0" bIns="0" rtlCol="0" anchor="ctr"/>
           <a:lstStyle/>
           <a:p>
-            <a:pPr algn="ctr" indent="0" marL="0">
+            <a:pPr marL="0" indent="0" algn="ctr">
               <a:buNone/>
             </a:pPr>
             <a:r>
@@ -5752,6 +5717,7 @@
         <a:solidFill>
           <a:srgbClr val="F5F6F8"/>
         </a:solidFill>
+        <a:effectLst/>
       </p:bgPr>
     </p:bg>
     <p:spTree>
@@ -5789,7 +5755,7 @@
           <a:bodyPr wrap="square" lIns="0" tIns="0" rIns="0" bIns="0" rtlCol="0" anchor="t"/>
           <a:lstStyle/>
           <a:p>
-            <a:pPr indent="0" marL="0">
+            <a:pPr marL="0" indent="0">
               <a:buNone/>
             </a:pPr>
             <a:r>
@@ -5833,6 +5799,13 @@
             <a:prstDash val="solid"/>
           </a:ln>
         </p:spPr>
+        <p:txBody>
+          <a:bodyPr/>
+          <a:lstStyle/>
+          <a:p>
+            <a:endParaRPr lang="ko-KR" altLang="en-US"/>
+          </a:p>
+        </p:txBody>
       </p:sp>
       <p:sp>
         <p:nvSpPr>
@@ -5855,7 +5828,7 @@
           <a:bodyPr wrap="square" lIns="0" tIns="0" rIns="0" bIns="0" rtlCol="0" anchor="ctr"/>
           <a:lstStyle/>
           <a:p>
-            <a:pPr algn="ctr" indent="0" marL="0">
+            <a:pPr marL="0" indent="0" algn="ctr">
               <a:buNone/>
             </a:pPr>
             <a:r>
@@ -5899,13 +5872,20 @@
             <a:prstDash val="solid"/>
           </a:ln>
           <a:effectLst>
-            <a:outerShdw sx="100000" sy="100000" kx="0" ky="0" algn="bl" rotWithShape="0" blurRad="76200" dist="25400" dir="5400000">
+            <a:outerShdw blurRad="76200" dist="25400" dir="5400000" algn="bl" rotWithShape="0">
               <a:srgbClr val="000000">
                 <a:alpha val="12000"/>
               </a:srgbClr>
             </a:outerShdw>
           </a:effectLst>
         </p:spPr>
+        <p:txBody>
+          <a:bodyPr/>
+          <a:lstStyle/>
+          <a:p>
+            <a:endParaRPr lang="ko-KR" altLang="en-US"/>
+          </a:p>
+        </p:txBody>
       </p:sp>
       <p:sp>
         <p:nvSpPr>
@@ -5928,7 +5908,7 @@
           <a:bodyPr wrap="square" lIns="0" tIns="0" rIns="0" bIns="0" rtlCol="0" anchor="ctr"/>
           <a:lstStyle/>
           <a:p>
-            <a:pPr indent="0" marL="0">
+            <a:pPr marL="0" indent="0">
               <a:buNone/>
             </a:pPr>
             <a:r>
@@ -5942,9 +5922,6 @@
               </a:rPr>
               <a:t>첫 시도</a:t>
             </a:r>
-            <a:pPr indent="0" marL="0">
-              <a:buNone/>
-            </a:pPr>
             <a:r>
               <a:rPr lang="en-US" sz="1500" dirty="0">
                 <a:solidFill>
@@ -5986,6 +5963,13 @@
             <a:prstDash val="solid"/>
           </a:ln>
         </p:spPr>
+        <p:txBody>
+          <a:bodyPr/>
+          <a:lstStyle/>
+          <a:p>
+            <a:endParaRPr lang="ko-KR" altLang="en-US"/>
+          </a:p>
+        </p:txBody>
       </p:sp>
       <p:sp>
         <p:nvSpPr>
@@ -6008,7 +5992,7 @@
           <a:bodyPr wrap="square" lIns="0" tIns="0" rIns="0" bIns="0" rtlCol="0" anchor="ctr"/>
           <a:lstStyle/>
           <a:p>
-            <a:pPr algn="ctr" indent="0" marL="0">
+            <a:pPr marL="0" indent="0" algn="ctr">
               <a:buNone/>
             </a:pPr>
             <a:r>
@@ -6052,13 +6036,20 @@
             <a:prstDash val="solid"/>
           </a:ln>
           <a:effectLst>
-            <a:outerShdw sx="100000" sy="100000" kx="0" ky="0" algn="bl" rotWithShape="0" blurRad="76200" dist="25400" dir="5400000">
+            <a:outerShdw blurRad="76200" dist="25400" dir="5400000" algn="bl" rotWithShape="0">
               <a:srgbClr val="000000">
                 <a:alpha val="12000"/>
               </a:srgbClr>
             </a:outerShdw>
           </a:effectLst>
         </p:spPr>
+        <p:txBody>
+          <a:bodyPr/>
+          <a:lstStyle/>
+          <a:p>
+            <a:endParaRPr lang="ko-KR" altLang="en-US"/>
+          </a:p>
+        </p:txBody>
       </p:sp>
       <p:sp>
         <p:nvSpPr>
@@ -6081,7 +6072,7 @@
           <a:bodyPr wrap="square" lIns="0" tIns="0" rIns="0" bIns="0" rtlCol="0" anchor="ctr"/>
           <a:lstStyle/>
           <a:p>
-            <a:pPr indent="0" marL="0">
+            <a:pPr marL="0" indent="0">
               <a:buNone/>
             </a:pPr>
             <a:r>
@@ -6095,9 +6086,6 @@
               </a:rPr>
               <a:t>로컬 LLM 도입</a:t>
             </a:r>
-            <a:pPr indent="0" marL="0">
-              <a:buNone/>
-            </a:pPr>
             <a:r>
               <a:rPr lang="en-US" sz="1500" dirty="0">
                 <a:solidFill>
@@ -6139,6 +6127,13 @@
             <a:prstDash val="solid"/>
           </a:ln>
         </p:spPr>
+        <p:txBody>
+          <a:bodyPr/>
+          <a:lstStyle/>
+          <a:p>
+            <a:endParaRPr lang="ko-KR" altLang="en-US"/>
+          </a:p>
+        </p:txBody>
       </p:sp>
       <p:sp>
         <p:nvSpPr>
@@ -6161,7 +6156,7 @@
           <a:bodyPr wrap="square" lIns="0" tIns="0" rIns="0" bIns="0" rtlCol="0" anchor="ctr"/>
           <a:lstStyle/>
           <a:p>
-            <a:pPr algn="ctr" indent="0" marL="0">
+            <a:pPr marL="0" indent="0" algn="ctr">
               <a:buNone/>
             </a:pPr>
             <a:r>
@@ -6205,13 +6200,20 @@
             <a:prstDash val="solid"/>
           </a:ln>
           <a:effectLst>
-            <a:outerShdw sx="100000" sy="100000" kx="0" ky="0" algn="bl" rotWithShape="0" blurRad="76200" dist="25400" dir="5400000">
+            <a:outerShdw blurRad="76200" dist="25400" dir="5400000" algn="bl" rotWithShape="0">
               <a:srgbClr val="000000">
                 <a:alpha val="12000"/>
               </a:srgbClr>
             </a:outerShdw>
           </a:effectLst>
         </p:spPr>
+        <p:txBody>
+          <a:bodyPr/>
+          <a:lstStyle/>
+          <a:p>
+            <a:endParaRPr lang="ko-KR" altLang="en-US"/>
+          </a:p>
+        </p:txBody>
       </p:sp>
       <p:sp>
         <p:nvSpPr>
@@ -6234,7 +6236,7 @@
           <a:bodyPr wrap="square" lIns="0" tIns="0" rIns="0" bIns="0" rtlCol="0" anchor="ctr"/>
           <a:lstStyle/>
           <a:p>
-            <a:pPr indent="0" marL="0">
+            <a:pPr marL="0" indent="0">
               <a:buNone/>
             </a:pPr>
             <a:r>
@@ -6248,9 +6250,6 @@
               </a:rPr>
               <a:t>손 안정화</a:t>
             </a:r>
-            <a:pPr indent="0" marL="0">
-              <a:buNone/>
-            </a:pPr>
             <a:r>
               <a:rPr lang="en-US" sz="1500" dirty="0">
                 <a:solidFill>
@@ -6292,6 +6291,13 @@
             <a:prstDash val="solid"/>
           </a:ln>
         </p:spPr>
+        <p:txBody>
+          <a:bodyPr/>
+          <a:lstStyle/>
+          <a:p>
+            <a:endParaRPr lang="ko-KR" altLang="en-US"/>
+          </a:p>
+        </p:txBody>
       </p:sp>
       <p:sp>
         <p:nvSpPr>
@@ -6314,7 +6320,7 @@
           <a:bodyPr wrap="square" lIns="0" tIns="0" rIns="0" bIns="0" rtlCol="0" anchor="ctr"/>
           <a:lstStyle/>
           <a:p>
-            <a:pPr algn="ctr" indent="0" marL="0">
+            <a:pPr marL="0" indent="0" algn="ctr">
               <a:buNone/>
             </a:pPr>
             <a:r>
@@ -6358,13 +6364,20 @@
             <a:prstDash val="solid"/>
           </a:ln>
           <a:effectLst>
-            <a:outerShdw sx="100000" sy="100000" kx="0" ky="0" algn="bl" rotWithShape="0" blurRad="76200" dist="25400" dir="5400000">
+            <a:outerShdw blurRad="76200" dist="25400" dir="5400000" algn="bl" rotWithShape="0">
               <a:srgbClr val="000000">
                 <a:alpha val="12000"/>
               </a:srgbClr>
             </a:outerShdw>
           </a:effectLst>
         </p:spPr>
+        <p:txBody>
+          <a:bodyPr/>
+          <a:lstStyle/>
+          <a:p>
+            <a:endParaRPr lang="ko-KR" altLang="en-US"/>
+          </a:p>
+        </p:txBody>
       </p:sp>
       <p:sp>
         <p:nvSpPr>
@@ -6387,7 +6400,7 @@
           <a:bodyPr wrap="square" lIns="0" tIns="0" rIns="0" bIns="0" rtlCol="0" anchor="ctr"/>
           <a:lstStyle/>
           <a:p>
-            <a:pPr indent="0" marL="0">
+            <a:pPr marL="0" indent="0">
               <a:buNone/>
             </a:pPr>
             <a:r>
@@ -6401,9 +6414,6 @@
               </a:rPr>
               <a:t>음성 명령</a:t>
             </a:r>
-            <a:pPr indent="0" marL="0">
-              <a:buNone/>
-            </a:pPr>
             <a:r>
               <a:rPr lang="en-US" sz="1500" dirty="0">
                 <a:solidFill>
@@ -6445,6 +6455,13 @@
             <a:prstDash val="solid"/>
           </a:ln>
         </p:spPr>
+        <p:txBody>
+          <a:bodyPr/>
+          <a:lstStyle/>
+          <a:p>
+            <a:endParaRPr lang="ko-KR" altLang="en-US"/>
+          </a:p>
+        </p:txBody>
       </p:sp>
       <p:sp>
         <p:nvSpPr>
@@ -6467,7 +6484,7 @@
           <a:bodyPr wrap="square" lIns="0" tIns="0" rIns="0" bIns="0" rtlCol="0" anchor="ctr"/>
           <a:lstStyle/>
           <a:p>
-            <a:pPr algn="ctr" indent="0" marL="0">
+            <a:pPr marL="0" indent="0" algn="ctr">
               <a:buNone/>
             </a:pPr>
             <a:r>
@@ -6511,13 +6528,20 @@
             <a:prstDash val="solid"/>
           </a:ln>
           <a:effectLst>
-            <a:outerShdw sx="100000" sy="100000" kx="0" ky="0" algn="bl" rotWithShape="0" blurRad="76200" dist="25400" dir="5400000">
+            <a:outerShdw blurRad="76200" dist="25400" dir="5400000" algn="bl" rotWithShape="0">
               <a:srgbClr val="000000">
                 <a:alpha val="12000"/>
               </a:srgbClr>
             </a:outerShdw>
           </a:effectLst>
         </p:spPr>
+        <p:txBody>
+          <a:bodyPr/>
+          <a:lstStyle/>
+          <a:p>
+            <a:endParaRPr lang="ko-KR" altLang="en-US"/>
+          </a:p>
+        </p:txBody>
       </p:sp>
       <p:sp>
         <p:nvSpPr>
@@ -6540,7 +6564,7 @@
           <a:bodyPr wrap="square" lIns="0" tIns="0" rIns="0" bIns="0" rtlCol="0" anchor="ctr"/>
           <a:lstStyle/>
           <a:p>
-            <a:pPr indent="0" marL="0">
+            <a:pPr marL="0" indent="0">
               <a:buNone/>
             </a:pPr>
             <a:r>
@@ -6554,9 +6578,6 @@
               </a:rPr>
               <a:t>포즈 · 모드 전환</a:t>
             </a:r>
-            <a:pPr indent="0" marL="0">
-              <a:buNone/>
-            </a:pPr>
             <a:r>
               <a:rPr lang="en-US" sz="1500" dirty="0">
                 <a:solidFill>
@@ -6588,6 +6609,7 @@
         <a:solidFill>
           <a:srgbClr val="F5F6F8"/>
         </a:solidFill>
+        <a:effectLst/>
       </p:bgPr>
     </p:bg>
     <p:spTree>
@@ -6625,7 +6647,7 @@
           <a:bodyPr wrap="square" lIns="0" tIns="0" rIns="0" bIns="0" rtlCol="0" anchor="t"/>
           <a:lstStyle/>
           <a:p>
-            <a:pPr indent="0" marL="0">
+            <a:pPr marL="0" indent="0">
               <a:buNone/>
             </a:pPr>
             <a:r>
@@ -6664,7 +6686,7 @@
           <a:bodyPr wrap="square" lIns="0" tIns="0" rIns="0" bIns="0" rtlCol="0" anchor="t"/>
           <a:lstStyle/>
           <a:p>
-            <a:pPr indent="0" marL="0">
+            <a:pPr marL="0" indent="0">
               <a:buNone/>
             </a:pPr>
             <a:r>
@@ -6703,7 +6725,7 @@
           <a:bodyPr wrap="square" lIns="0" tIns="0" rIns="0" bIns="0" rtlCol="0" anchor="t"/>
           <a:lstStyle/>
           <a:p>
-            <a:pPr indent="0" marL="0">
+            <a:pPr marL="0" indent="0">
               <a:buNone/>
             </a:pPr>
             <a:r>
@@ -6742,7 +6764,7 @@
           <a:bodyPr wrap="square" lIns="0" tIns="0" rIns="0" bIns="0" rtlCol="0" anchor="t"/>
           <a:lstStyle/>
           <a:p>
-            <a:pPr indent="0" marL="0">
+            <a:pPr marL="0" indent="0">
               <a:buNone/>
             </a:pPr>
             <a:r>
@@ -6786,13 +6808,20 @@
             <a:prstDash val="solid"/>
           </a:ln>
           <a:effectLst>
-            <a:outerShdw sx="100000" sy="100000" kx="0" ky="0" algn="bl" rotWithShape="0" blurRad="76200" dist="25400" dir="5400000">
+            <a:outerShdw blurRad="76200" dist="25400" dir="5400000" algn="bl" rotWithShape="0">
               <a:srgbClr val="000000">
                 <a:alpha val="12000"/>
               </a:srgbClr>
             </a:outerShdw>
           </a:effectLst>
         </p:spPr>
+        <p:txBody>
+          <a:bodyPr/>
+          <a:lstStyle/>
+          <a:p>
+            <a:endParaRPr lang="ko-KR" altLang="en-US"/>
+          </a:p>
+        </p:txBody>
       </p:sp>
       <p:sp>
         <p:nvSpPr>
@@ -6820,6 +6849,13 @@
             <a:prstDash val="solid"/>
           </a:ln>
         </p:spPr>
+        <p:txBody>
+          <a:bodyPr/>
+          <a:lstStyle/>
+          <a:p>
+            <a:endParaRPr lang="ko-KR" altLang="en-US"/>
+          </a:p>
+        </p:txBody>
       </p:sp>
       <p:sp>
         <p:nvSpPr>
@@ -6847,6 +6883,13 @@
             <a:prstDash val="solid"/>
           </a:ln>
         </p:spPr>
+        <p:txBody>
+          <a:bodyPr/>
+          <a:lstStyle/>
+          <a:p>
+            <a:endParaRPr lang="ko-KR" altLang="en-US"/>
+          </a:p>
+        </p:txBody>
       </p:sp>
       <p:sp>
         <p:nvSpPr>
@@ -6869,7 +6912,7 @@
           <a:bodyPr wrap="square" lIns="0" tIns="0" rIns="0" bIns="0" rtlCol="0" anchor="t"/>
           <a:lstStyle/>
           <a:p>
-            <a:pPr indent="0" marL="0">
+            <a:pPr marL="0" indent="0">
               <a:spcAft>
                 <a:spcPts val="400"/>
               </a:spcAft>
@@ -6889,7 +6932,7 @@
             <a:endParaRPr lang="en-US" sz="1400" dirty="0"/>
           </a:p>
           <a:p>
-            <a:pPr indent="0" marL="0">
+            <a:pPr marL="0" indent="0">
               <a:spcAft>
                 <a:spcPts val="400"/>
               </a:spcAft>
@@ -6931,7 +6974,7 @@
           <a:bodyPr wrap="square" lIns="0" tIns="0" rIns="0" bIns="0" rtlCol="0" anchor="t"/>
           <a:lstStyle/>
           <a:p>
-            <a:pPr indent="0" marL="0">
+            <a:pPr marL="0" indent="0">
               <a:spcAft>
                 <a:spcPts val="400"/>
               </a:spcAft>
@@ -6951,7 +6994,7 @@
             <a:endParaRPr lang="en-US" sz="1400" dirty="0"/>
           </a:p>
           <a:p>
-            <a:pPr indent="0" marL="0">
+            <a:pPr marL="0" indent="0">
               <a:spcAft>
                 <a:spcPts val="400"/>
               </a:spcAft>
@@ -6993,7 +7036,7 @@
           <a:bodyPr wrap="square" lIns="0" tIns="0" rIns="0" bIns="0" rtlCol="0" anchor="t"/>
           <a:lstStyle/>
           <a:p>
-            <a:pPr indent="0" marL="0">
+            <a:pPr marL="0" indent="0">
               <a:spcAft>
                 <a:spcPts val="400"/>
               </a:spcAft>
@@ -7013,7 +7056,7 @@
             <a:endParaRPr lang="en-US" sz="1400" dirty="0"/>
           </a:p>
           <a:p>
-            <a:pPr indent="0" marL="0">
+            <a:pPr marL="0" indent="0">
               <a:spcAft>
                 <a:spcPts val="400"/>
               </a:spcAft>
@@ -7055,7 +7098,7 @@
           <a:bodyPr wrap="square" lIns="0" tIns="0" rIns="0" bIns="0" rtlCol="0" anchor="ctr"/>
           <a:lstStyle/>
           <a:p>
-            <a:pPr algn="ctr" indent="0" marL="0">
+            <a:pPr marL="0" indent="0" algn="ctr">
               <a:buNone/>
             </a:pPr>
             <a:r>
@@ -7094,7 +7137,7 @@
           <a:bodyPr wrap="square" lIns="0" tIns="0" rIns="0" bIns="0" rtlCol="0" anchor="ctr"/>
           <a:lstStyle/>
           <a:p>
-            <a:pPr algn="ctr" indent="0" marL="0">
+            <a:pPr marL="0" indent="0" algn="ctr">
               <a:buNone/>
             </a:pPr>
             <a:r>
@@ -7138,13 +7181,20 @@
             <a:prstDash val="solid"/>
           </a:ln>
           <a:effectLst>
-            <a:outerShdw sx="100000" sy="100000" kx="0" ky="0" algn="bl" rotWithShape="0" blurRad="76200" dist="25400" dir="5400000">
+            <a:outerShdw blurRad="76200" dist="25400" dir="5400000" algn="bl" rotWithShape="0">
               <a:srgbClr val="000000">
                 <a:alpha val="12000"/>
               </a:srgbClr>
             </a:outerShdw>
           </a:effectLst>
         </p:spPr>
+        <p:txBody>
+          <a:bodyPr/>
+          <a:lstStyle/>
+          <a:p>
+            <a:endParaRPr lang="ko-KR" altLang="en-US"/>
+          </a:p>
+        </p:txBody>
       </p:sp>
       <p:sp>
         <p:nvSpPr>
@@ -7172,6 +7222,13 @@
             <a:prstDash val="solid"/>
           </a:ln>
         </p:spPr>
+        <p:txBody>
+          <a:bodyPr/>
+          <a:lstStyle/>
+          <a:p>
+            <a:endParaRPr lang="ko-KR" altLang="en-US"/>
+          </a:p>
+        </p:txBody>
       </p:sp>
       <p:sp>
         <p:nvSpPr>
@@ -7199,6 +7256,13 @@
             <a:prstDash val="solid"/>
           </a:ln>
         </p:spPr>
+        <p:txBody>
+          <a:bodyPr/>
+          <a:lstStyle/>
+          <a:p>
+            <a:endParaRPr lang="ko-KR" altLang="en-US"/>
+          </a:p>
+        </p:txBody>
       </p:sp>
       <p:sp>
         <p:nvSpPr>
@@ -7221,7 +7285,7 @@
           <a:bodyPr wrap="square" lIns="0" tIns="0" rIns="0" bIns="0" rtlCol="0" anchor="t"/>
           <a:lstStyle/>
           <a:p>
-            <a:pPr indent="0" marL="0">
+            <a:pPr marL="0" indent="0">
               <a:spcAft>
                 <a:spcPts val="400"/>
               </a:spcAft>
@@ -7241,7 +7305,7 @@
             <a:endParaRPr lang="en-US" sz="1400" dirty="0"/>
           </a:p>
           <a:p>
-            <a:pPr indent="0" marL="0">
+            <a:pPr marL="0" indent="0">
               <a:spcAft>
                 <a:spcPts val="400"/>
               </a:spcAft>
@@ -7283,7 +7347,7 @@
           <a:bodyPr wrap="square" lIns="0" tIns="0" rIns="0" bIns="0" rtlCol="0" anchor="t"/>
           <a:lstStyle/>
           <a:p>
-            <a:pPr indent="0" marL="0">
+            <a:pPr marL="0" indent="0">
               <a:spcAft>
                 <a:spcPts val="400"/>
               </a:spcAft>
@@ -7303,7 +7367,7 @@
             <a:endParaRPr lang="en-US" sz="1400" dirty="0"/>
           </a:p>
           <a:p>
-            <a:pPr indent="0" marL="0">
+            <a:pPr marL="0" indent="0">
               <a:spcAft>
                 <a:spcPts val="400"/>
               </a:spcAft>
@@ -7345,7 +7409,7 @@
           <a:bodyPr wrap="square" lIns="0" tIns="0" rIns="0" bIns="0" rtlCol="0" anchor="t"/>
           <a:lstStyle/>
           <a:p>
-            <a:pPr indent="0" marL="0">
+            <a:pPr marL="0" indent="0">
               <a:spcAft>
                 <a:spcPts val="400"/>
               </a:spcAft>
@@ -7365,7 +7429,7 @@
             <a:endParaRPr lang="en-US" sz="1400" dirty="0"/>
           </a:p>
           <a:p>
-            <a:pPr indent="0" marL="0">
+            <a:pPr marL="0" indent="0">
               <a:spcAft>
                 <a:spcPts val="400"/>
               </a:spcAft>
@@ -7407,7 +7471,7 @@
           <a:bodyPr wrap="square" lIns="0" tIns="0" rIns="0" bIns="0" rtlCol="0" anchor="ctr"/>
           <a:lstStyle/>
           <a:p>
-            <a:pPr algn="ctr" indent="0" marL="0">
+            <a:pPr marL="0" indent="0" algn="ctr">
               <a:buNone/>
             </a:pPr>
             <a:r>
@@ -7446,7 +7510,7 @@
           <a:bodyPr wrap="square" lIns="0" tIns="0" rIns="0" bIns="0" rtlCol="0" anchor="ctr"/>
           <a:lstStyle/>
           <a:p>
-            <a:pPr algn="ctr" indent="0" marL="0">
+            <a:pPr marL="0" indent="0" algn="ctr">
               <a:buNone/>
             </a:pPr>
             <a:r>
@@ -7490,13 +7554,20 @@
             <a:prstDash val="solid"/>
           </a:ln>
           <a:effectLst>
-            <a:outerShdw sx="100000" sy="100000" kx="0" ky="0" algn="bl" rotWithShape="0" blurRad="76200" dist="25400" dir="5400000">
+            <a:outerShdw blurRad="76200" dist="25400" dir="5400000" algn="bl" rotWithShape="0">
               <a:srgbClr val="000000">
                 <a:alpha val="12000"/>
               </a:srgbClr>
             </a:outerShdw>
           </a:effectLst>
         </p:spPr>
+        <p:txBody>
+          <a:bodyPr/>
+          <a:lstStyle/>
+          <a:p>
+            <a:endParaRPr lang="ko-KR" altLang="en-US"/>
+          </a:p>
+        </p:txBody>
       </p:sp>
       <p:sp>
         <p:nvSpPr>
@@ -7524,6 +7595,13 @@
             <a:prstDash val="solid"/>
           </a:ln>
         </p:spPr>
+        <p:txBody>
+          <a:bodyPr/>
+          <a:lstStyle/>
+          <a:p>
+            <a:endParaRPr lang="ko-KR" altLang="en-US"/>
+          </a:p>
+        </p:txBody>
       </p:sp>
       <p:sp>
         <p:nvSpPr>
@@ -7551,6 +7629,13 @@
             <a:prstDash val="solid"/>
           </a:ln>
         </p:spPr>
+        <p:txBody>
+          <a:bodyPr/>
+          <a:lstStyle/>
+          <a:p>
+            <a:endParaRPr lang="ko-KR" altLang="en-US"/>
+          </a:p>
+        </p:txBody>
       </p:sp>
       <p:sp>
         <p:nvSpPr>
@@ -7573,7 +7658,7 @@
           <a:bodyPr wrap="square" lIns="0" tIns="0" rIns="0" bIns="0" rtlCol="0" anchor="t"/>
           <a:lstStyle/>
           <a:p>
-            <a:pPr indent="0" marL="0">
+            <a:pPr marL="0" indent="0">
               <a:spcAft>
                 <a:spcPts val="400"/>
               </a:spcAft>
@@ -7593,7 +7678,7 @@
             <a:endParaRPr lang="en-US" sz="1400" dirty="0"/>
           </a:p>
           <a:p>
-            <a:pPr indent="0" marL="0">
+            <a:pPr marL="0" indent="0">
               <a:spcAft>
                 <a:spcPts val="400"/>
               </a:spcAft>
@@ -7635,7 +7720,7 @@
           <a:bodyPr wrap="square" lIns="0" tIns="0" rIns="0" bIns="0" rtlCol="0" anchor="t"/>
           <a:lstStyle/>
           <a:p>
-            <a:pPr indent="0" marL="0">
+            <a:pPr marL="0" indent="0">
               <a:spcAft>
                 <a:spcPts val="400"/>
               </a:spcAft>
@@ -7655,7 +7740,7 @@
             <a:endParaRPr lang="en-US" sz="1400" dirty="0"/>
           </a:p>
           <a:p>
-            <a:pPr indent="0" marL="0">
+            <a:pPr marL="0" indent="0">
               <a:spcAft>
                 <a:spcPts val="400"/>
               </a:spcAft>
@@ -7697,7 +7782,7 @@
           <a:bodyPr wrap="square" lIns="0" tIns="0" rIns="0" bIns="0" rtlCol="0" anchor="t"/>
           <a:lstStyle/>
           <a:p>
-            <a:pPr indent="0" marL="0">
+            <a:pPr marL="0" indent="0">
               <a:spcAft>
                 <a:spcPts val="400"/>
               </a:spcAft>
@@ -7717,7 +7802,7 @@
             <a:endParaRPr lang="en-US" sz="1400" dirty="0"/>
           </a:p>
           <a:p>
-            <a:pPr indent="0" marL="0">
+            <a:pPr marL="0" indent="0">
               <a:spcAft>
                 <a:spcPts val="400"/>
               </a:spcAft>
@@ -7759,7 +7844,7 @@
           <a:bodyPr wrap="square" lIns="0" tIns="0" rIns="0" bIns="0" rtlCol="0" anchor="ctr"/>
           <a:lstStyle/>
           <a:p>
-            <a:pPr algn="ctr" indent="0" marL="0">
+            <a:pPr marL="0" indent="0" algn="ctr">
               <a:buNone/>
             </a:pPr>
             <a:r>
@@ -7798,7 +7883,7 @@
           <a:bodyPr wrap="square" lIns="0" tIns="0" rIns="0" bIns="0" rtlCol="0" anchor="ctr"/>
           <a:lstStyle/>
           <a:p>
-            <a:pPr algn="ctr" indent="0" marL="0">
+            <a:pPr marL="0" indent="0" algn="ctr">
               <a:buNone/>
             </a:pPr>
             <a:r>
@@ -7832,6 +7917,7 @@
         <a:solidFill>
           <a:srgbClr val="F5F6F8"/>
         </a:solidFill>
+        <a:effectLst/>
       </p:bgPr>
     </p:bg>
     <p:spTree>
@@ -7869,7 +7955,7 @@
           <a:bodyPr wrap="square" lIns="0" tIns="0" rIns="0" bIns="0" rtlCol="0" anchor="t"/>
           <a:lstStyle/>
           <a:p>
-            <a:pPr indent="0" marL="0">
+            <a:pPr marL="0" indent="0">
               <a:buNone/>
             </a:pPr>
             <a:r>
@@ -7913,6 +7999,13 @@
             <a:prstDash val="solid"/>
           </a:ln>
         </p:spPr>
+        <p:txBody>
+          <a:bodyPr/>
+          <a:lstStyle/>
+          <a:p>
+            <a:endParaRPr lang="ko-KR" altLang="en-US"/>
+          </a:p>
+        </p:txBody>
       </p:sp>
       <p:sp>
         <p:nvSpPr>
@@ -7935,7 +8028,7 @@
           <a:bodyPr wrap="square" lIns="0" tIns="0" rIns="0" bIns="0" rtlCol="0" anchor="t"/>
           <a:lstStyle/>
           <a:p>
-            <a:pPr indent="0" marL="0">
+            <a:pPr marL="0" indent="0">
               <a:buNone/>
             </a:pPr>
             <a:r>
@@ -7974,7 +8067,7 @@
           <a:bodyPr wrap="square" lIns="0" tIns="0" rIns="0" bIns="0" rtlCol="0" anchor="t"/>
           <a:lstStyle/>
           <a:p>
-            <a:pPr indent="0" marL="0">
+            <a:pPr marL="0" indent="0">
               <a:buNone/>
             </a:pPr>
             <a:r>
@@ -8013,7 +8106,7 @@
           <a:bodyPr wrap="square" lIns="0" tIns="0" rIns="0" bIns="0" rtlCol="0" anchor="t"/>
           <a:lstStyle/>
           <a:p>
-            <a:pPr indent="0" marL="0">
+            <a:pPr marL="0" indent="0">
               <a:buNone/>
             </a:pPr>
             <a:r>
@@ -8057,6 +8150,13 @@
             <a:prstDash val="solid"/>
           </a:ln>
         </p:spPr>
+        <p:txBody>
+          <a:bodyPr/>
+          <a:lstStyle/>
+          <a:p>
+            <a:endParaRPr lang="ko-KR" altLang="en-US"/>
+          </a:p>
+        </p:txBody>
       </p:sp>
       <p:sp>
         <p:nvSpPr>
@@ -8079,7 +8179,7 @@
           <a:bodyPr wrap="square" lIns="0" tIns="0" rIns="0" bIns="0" rtlCol="0" anchor="t"/>
           <a:lstStyle/>
           <a:p>
-            <a:pPr indent="0" marL="0">
+            <a:pPr marL="0" indent="0">
               <a:spcAft>
                 <a:spcPts val="400"/>
               </a:spcAft>
@@ -8099,7 +8199,7 @@
             <a:endParaRPr lang="en-US" sz="1400" dirty="0"/>
           </a:p>
           <a:p>
-            <a:pPr indent="0" marL="0">
+            <a:pPr marL="0" indent="0">
               <a:spcAft>
                 <a:spcPts val="400"/>
               </a:spcAft>
@@ -8146,6 +8246,13 @@
             <a:prstDash val="solid"/>
           </a:ln>
         </p:spPr>
+        <p:txBody>
+          <a:bodyPr/>
+          <a:lstStyle/>
+          <a:p>
+            <a:endParaRPr lang="ko-KR" altLang="en-US"/>
+          </a:p>
+        </p:txBody>
       </p:sp>
       <p:sp>
         <p:nvSpPr>
@@ -8168,7 +8275,7 @@
           <a:bodyPr wrap="square" lIns="0" tIns="0" rIns="0" bIns="0" rtlCol="0" anchor="t"/>
           <a:lstStyle/>
           <a:p>
-            <a:pPr indent="0" marL="0">
+            <a:pPr marL="0" indent="0">
               <a:spcAft>
                 <a:spcPts val="400"/>
               </a:spcAft>
@@ -8188,7 +8295,7 @@
             <a:endParaRPr lang="en-US" sz="1400" dirty="0"/>
           </a:p>
           <a:p>
-            <a:pPr indent="0" marL="0">
+            <a:pPr marL="0" indent="0">
               <a:spcAft>
                 <a:spcPts val="400"/>
               </a:spcAft>
@@ -8235,6 +8342,13 @@
             <a:prstDash val="solid"/>
           </a:ln>
         </p:spPr>
+        <p:txBody>
+          <a:bodyPr/>
+          <a:lstStyle/>
+          <a:p>
+            <a:endParaRPr lang="ko-KR" altLang="en-US"/>
+          </a:p>
+        </p:txBody>
       </p:sp>
       <p:sp>
         <p:nvSpPr>
@@ -8257,7 +8371,7 @@
           <a:bodyPr wrap="square" lIns="0" tIns="0" rIns="0" bIns="0" rtlCol="0" anchor="t"/>
           <a:lstStyle/>
           <a:p>
-            <a:pPr indent="0" marL="0">
+            <a:pPr marL="0" indent="0">
               <a:spcAft>
                 <a:spcPts val="400"/>
               </a:spcAft>
@@ -8277,7 +8391,7 @@
             <a:endParaRPr lang="en-US" sz="1400" dirty="0"/>
           </a:p>
           <a:p>
-            <a:pPr indent="0" marL="0">
+            <a:pPr marL="0" indent="0">
               <a:spcAft>
                 <a:spcPts val="400"/>
               </a:spcAft>
@@ -8314,6 +8428,7 @@
         <a:solidFill>
           <a:srgbClr val="F5F6F8"/>
         </a:solidFill>
+        <a:effectLst/>
       </p:bgPr>
     </p:bg>
     <p:spTree>
@@ -8351,7 +8466,7 @@
           <a:bodyPr wrap="square" lIns="0" tIns="0" rIns="0" bIns="0" rtlCol="0" anchor="t"/>
           <a:lstStyle/>
           <a:p>
-            <a:pPr indent="0" marL="0">
+            <a:pPr marL="0" indent="0">
               <a:buNone/>
             </a:pPr>
             <a:r>
@@ -8395,13 +8510,20 @@
             <a:prstDash val="solid"/>
           </a:ln>
           <a:effectLst>
-            <a:outerShdw sx="100000" sy="100000" kx="0" ky="0" algn="bl" rotWithShape="0" blurRad="76200" dist="25400" dir="5400000">
+            <a:outerShdw blurRad="76200" dist="25400" dir="5400000" algn="bl" rotWithShape="0">
               <a:srgbClr val="000000">
                 <a:alpha val="12000"/>
               </a:srgbClr>
             </a:outerShdw>
           </a:effectLst>
         </p:spPr>
+        <p:txBody>
+          <a:bodyPr/>
+          <a:lstStyle/>
+          <a:p>
+            <a:endParaRPr lang="ko-KR" altLang="en-US"/>
+          </a:p>
+        </p:txBody>
       </p:sp>
       <p:sp>
         <p:nvSpPr>
@@ -8424,7 +8546,7 @@
           <a:bodyPr wrap="square" lIns="0" tIns="0" rIns="0" bIns="0" rtlCol="0" anchor="t"/>
           <a:lstStyle/>
           <a:p>
-            <a:pPr indent="0" marL="0">
+            <a:pPr marL="0" indent="0">
               <a:spcAft>
                 <a:spcPts val="400"/>
               </a:spcAft>
@@ -8444,7 +8566,7 @@
             <a:endParaRPr lang="en-US" sz="1400" dirty="0"/>
           </a:p>
           <a:p>
-            <a:pPr indent="0" marL="0">
+            <a:pPr marL="0" indent="0">
               <a:spcAft>
                 <a:spcPts val="400"/>
               </a:spcAft>
@@ -8491,6 +8613,13 @@
             <a:prstDash val="solid"/>
           </a:ln>
         </p:spPr>
+        <p:txBody>
+          <a:bodyPr/>
+          <a:lstStyle/>
+          <a:p>
+            <a:endParaRPr lang="ko-KR" altLang="en-US"/>
+          </a:p>
+        </p:txBody>
       </p:sp>
       <p:sp>
         <p:nvSpPr>
@@ -8513,7 +8642,7 @@
           <a:bodyPr wrap="square" lIns="0" tIns="0" rIns="0" bIns="0" rtlCol="0" anchor="t"/>
           <a:lstStyle/>
           <a:p>
-            <a:pPr indent="0" marL="0">
+            <a:pPr marL="0" indent="0">
               <a:spcAft>
                 <a:spcPts val="400"/>
               </a:spcAft>
@@ -8533,7 +8662,7 @@
             <a:endParaRPr lang="en-US" sz="1400" dirty="0"/>
           </a:p>
           <a:p>
-            <a:pPr indent="0" marL="0">
+            <a:pPr marL="0" indent="0">
               <a:spcAft>
                 <a:spcPts val="400"/>
               </a:spcAft>
@@ -8548,7 +8677,51 @@
                 <a:ea typeface="Malgun Gothic" pitchFamily="34" charset="-122"/>
                 <a:cs typeface="Malgun Gothic" pitchFamily="34" charset="-120"/>
               </a:rPr>
-              <a:t>사람마다 눈 크기가 달라 기준값을 따로 맞춰야 함. 수치 조정에만 시간이 들어가는 중이었다</a:t>
+              <a:t>사람마다 눈 크기가 달라 기준값을 </a:t>
+            </a:r>
+            <a:r>
+              <a:rPr lang="en-US" sz="1600" dirty="0" err="1">
+                <a:solidFill>
+                  <a:srgbClr val="1B2230"/>
+                </a:solidFill>
+                <a:latin typeface="Malgun Gothic" pitchFamily="34" charset="0"/>
+                <a:ea typeface="Malgun Gothic" pitchFamily="34" charset="-122"/>
+                <a:cs typeface="Malgun Gothic" pitchFamily="34" charset="-120"/>
+              </a:rPr>
+              <a:t>따로</a:t>
+            </a:r>
+            <a:r>
+              <a:rPr lang="en-US" sz="1600" dirty="0">
+                <a:solidFill>
+                  <a:srgbClr val="1B2230"/>
+                </a:solidFill>
+                <a:latin typeface="Malgun Gothic" pitchFamily="34" charset="0"/>
+                <a:ea typeface="Malgun Gothic" pitchFamily="34" charset="-122"/>
+                <a:cs typeface="Malgun Gothic" pitchFamily="34" charset="-120"/>
+              </a:rPr>
+              <a:t> </a:t>
+            </a:r>
+            <a:r>
+              <a:rPr lang="en-US" sz="1600" dirty="0" err="1">
+                <a:solidFill>
+                  <a:srgbClr val="1B2230"/>
+                </a:solidFill>
+                <a:latin typeface="Malgun Gothic" pitchFamily="34" charset="0"/>
+                <a:ea typeface="Malgun Gothic" pitchFamily="34" charset="-122"/>
+                <a:cs typeface="Malgun Gothic" pitchFamily="34" charset="-120"/>
+              </a:rPr>
+              <a:t>맞춰</a:t>
+            </a:r>
+            <a:r>
+              <a:rPr lang="ko-KR" altLang="en-US" sz="1600" dirty="0">
+                <a:solidFill>
+                  <a:srgbClr val="1B2230"/>
+                </a:solidFill>
+                <a:latin typeface="Malgun Gothic" pitchFamily="34" charset="0"/>
+                <a:ea typeface="Malgun Gothic" pitchFamily="34" charset="-122"/>
+                <a:cs typeface="Malgun Gothic" pitchFamily="34" charset="-120"/>
+              </a:rPr>
+              <a:t>서 진행해도 값 기준이 모호해짐</a:t>
             </a:r>
             <a:endParaRPr lang="en-US" sz="1400" dirty="0"/>
           </a:p>
@@ -8580,6 +8753,13 @@
             <a:prstDash val="solid"/>
           </a:ln>
         </p:spPr>
+        <p:txBody>
+          <a:bodyPr/>
+          <a:lstStyle/>
+          <a:p>
+            <a:endParaRPr lang="ko-KR" altLang="en-US"/>
+          </a:p>
+        </p:txBody>
       </p:sp>
       <p:sp>
         <p:nvSpPr>
@@ -8602,7 +8782,7 @@
           <a:bodyPr wrap="square" lIns="0" tIns="0" rIns="0" bIns="0" rtlCol="0" anchor="t"/>
           <a:lstStyle/>
           <a:p>
-            <a:pPr indent="0" marL="0">
+            <a:pPr marL="0" indent="0">
               <a:spcAft>
                 <a:spcPts val="400"/>
               </a:spcAft>
@@ -8622,7 +8802,7 @@
             <a:endParaRPr lang="en-US" sz="1400" dirty="0"/>
           </a:p>
           <a:p>
-            <a:pPr indent="0" marL="0">
+            <a:pPr marL="0" indent="0">
               <a:spcAft>
                 <a:spcPts val="400"/>
               </a:spcAft>
@@ -8659,6 +8839,7 @@
         <a:solidFill>
           <a:srgbClr val="F5F6F8"/>
         </a:solidFill>
+        <a:effectLst/>
       </p:bgPr>
     </p:bg>
     <p:spTree>
@@ -8696,7 +8877,7 @@
           <a:bodyPr wrap="square" lIns="0" tIns="0" rIns="0" bIns="0" rtlCol="0" anchor="t"/>
           <a:lstStyle/>
           <a:p>
-            <a:pPr indent="0" marL="0">
+            <a:pPr marL="0" indent="0">
               <a:buNone/>
             </a:pPr>
             <a:r>
@@ -8740,6 +8921,13 @@
             <a:prstDash val="solid"/>
           </a:ln>
         </p:spPr>
+        <p:txBody>
+          <a:bodyPr/>
+          <a:lstStyle/>
+          <a:p>
+            <a:endParaRPr lang="ko-KR" altLang="en-US"/>
+          </a:p>
+        </p:txBody>
       </p:sp>
       <p:sp>
         <p:nvSpPr>
@@ -8762,7 +8950,7 @@
           <a:bodyPr wrap="square" lIns="0" tIns="0" rIns="0" bIns="0" rtlCol="0" anchor="t"/>
           <a:lstStyle/>
           <a:p>
-            <a:pPr indent="0" marL="0">
+            <a:pPr marL="0" indent="0">
               <a:buNone/>
             </a:pPr>
             <a:r>
@@ -8801,7 +8989,7 @@
           <a:bodyPr wrap="square" lIns="0" tIns="0" rIns="0" bIns="0" rtlCol="0" anchor="t"/>
           <a:lstStyle/>
           <a:p>
-            <a:pPr indent="0" marL="0">
+            <a:pPr marL="0" indent="0">
               <a:buNone/>
             </a:pPr>
             <a:r>
@@ -8840,7 +9028,7 @@
           <a:bodyPr wrap="square" lIns="0" tIns="0" rIns="0" bIns="0" rtlCol="0" anchor="t"/>
           <a:lstStyle/>
           <a:p>
-            <a:pPr indent="0" marL="0">
+            <a:pPr marL="0" indent="0">
               <a:buNone/>
             </a:pPr>
             <a:r>
@@ -8879,7 +9067,7 @@
           <a:bodyPr wrap="square" lIns="0" tIns="0" rIns="0" bIns="0" rtlCol="0" anchor="t"/>
           <a:lstStyle/>
           <a:p>
-            <a:pPr indent="0" marL="0">
+            <a:pPr marL="0" indent="0">
               <a:buNone/>
             </a:pPr>
             <a:r>
@@ -8923,6 +9111,13 @@
             <a:prstDash val="solid"/>
           </a:ln>
         </p:spPr>
+        <p:txBody>
+          <a:bodyPr/>
+          <a:lstStyle/>
+          <a:p>
+            <a:endParaRPr lang="ko-KR" altLang="en-US"/>
+          </a:p>
+        </p:txBody>
       </p:sp>
       <p:sp>
         <p:nvSpPr>
@@ -8950,6 +9145,13 @@
             <a:prstDash val="solid"/>
           </a:ln>
         </p:spPr>
+        <p:txBody>
+          <a:bodyPr/>
+          <a:lstStyle/>
+          <a:p>
+            <a:endParaRPr lang="ko-KR" altLang="en-US"/>
+          </a:p>
+        </p:txBody>
       </p:sp>
       <p:sp>
         <p:nvSpPr>
@@ -8972,7 +9174,7 @@
           <a:bodyPr wrap="square" lIns="0" tIns="0" rIns="0" bIns="0" rtlCol="0" anchor="t"/>
           <a:lstStyle/>
           <a:p>
-            <a:pPr indent="0" marL="0">
+            <a:pPr marL="0" indent="0">
               <a:buNone/>
             </a:pPr>
             <a:r>
@@ -9011,7 +9213,7 @@
           <a:bodyPr wrap="square" lIns="0" tIns="0" rIns="0" bIns="0" rtlCol="0" anchor="t"/>
           <a:lstStyle/>
           <a:p>
-            <a:pPr indent="0" marL="0">
+            <a:pPr marL="0" indent="0">
               <a:buNone/>
             </a:pPr>
             <a:r>
@@ -9050,7 +9252,7 @@
           <a:bodyPr wrap="square" lIns="0" tIns="0" rIns="0" bIns="0" rtlCol="0" anchor="ctr"/>
           <a:lstStyle/>
           <a:p>
-            <a:pPr algn="ctr" indent="0" marL="0">
+            <a:pPr marL="0" indent="0" algn="ctr">
               <a:buNone/>
             </a:pPr>
             <a:r>
@@ -9094,6 +9296,13 @@
             <a:prstDash val="solid"/>
           </a:ln>
         </p:spPr>
+        <p:txBody>
+          <a:bodyPr/>
+          <a:lstStyle/>
+          <a:p>
+            <a:endParaRPr lang="ko-KR" altLang="en-US"/>
+          </a:p>
+        </p:txBody>
       </p:sp>
       <p:sp>
         <p:nvSpPr>
@@ -9121,6 +9330,13 @@
             <a:prstDash val="solid"/>
           </a:ln>
         </p:spPr>
+        <p:txBody>
+          <a:bodyPr/>
+          <a:lstStyle/>
+          <a:p>
+            <a:endParaRPr lang="ko-KR" altLang="en-US"/>
+          </a:p>
+        </p:txBody>
       </p:sp>
       <p:sp>
         <p:nvSpPr>
@@ -9143,7 +9359,7 @@
           <a:bodyPr wrap="square" lIns="0" tIns="0" rIns="0" bIns="0" rtlCol="0" anchor="t"/>
           <a:lstStyle/>
           <a:p>
-            <a:pPr indent="0" marL="0">
+            <a:pPr marL="0" indent="0">
               <a:buNone/>
             </a:pPr>
             <a:r>
@@ -9182,7 +9398,7 @@
           <a:bodyPr wrap="square" lIns="0" tIns="0" rIns="0" bIns="0" rtlCol="0" anchor="t"/>
           <a:lstStyle/>
           <a:p>
-            <a:pPr indent="0" marL="0">
+            <a:pPr marL="0" indent="0">
               <a:buNone/>
             </a:pPr>
             <a:r>
@@ -9221,7 +9437,7 @@
           <a:bodyPr wrap="square" lIns="0" tIns="0" rIns="0" bIns="0" rtlCol="0" anchor="ctr"/>
           <a:lstStyle/>
           <a:p>
-            <a:pPr algn="ctr" indent="0" marL="0">
+            <a:pPr marL="0" indent="0" algn="ctr">
               <a:buNone/>
             </a:pPr>
             <a:r>
@@ -9265,6 +9481,13 @@
             <a:prstDash val="solid"/>
           </a:ln>
         </p:spPr>
+        <p:txBody>
+          <a:bodyPr/>
+          <a:lstStyle/>
+          <a:p>
+            <a:endParaRPr lang="ko-KR" altLang="en-US"/>
+          </a:p>
+        </p:txBody>
       </p:sp>
       <p:sp>
         <p:nvSpPr>
@@ -9292,6 +9515,13 @@
             <a:prstDash val="solid"/>
           </a:ln>
         </p:spPr>
+        <p:txBody>
+          <a:bodyPr/>
+          <a:lstStyle/>
+          <a:p>
+            <a:endParaRPr lang="ko-KR" altLang="en-US"/>
+          </a:p>
+        </p:txBody>
       </p:sp>
       <p:sp>
         <p:nvSpPr>
@@ -9314,7 +9544,7 @@
           <a:bodyPr wrap="square" lIns="0" tIns="0" rIns="0" bIns="0" rtlCol="0" anchor="t"/>
           <a:lstStyle/>
           <a:p>
-            <a:pPr indent="0" marL="0">
+            <a:pPr marL="0" indent="0">
               <a:buNone/>
             </a:pPr>
             <a:r>
@@ -9353,7 +9583,7 @@
           <a:bodyPr wrap="square" lIns="0" tIns="0" rIns="0" bIns="0" rtlCol="0" anchor="t"/>
           <a:lstStyle/>
           <a:p>
-            <a:pPr indent="0" marL="0">
+            <a:pPr marL="0" indent="0">
               <a:buNone/>
             </a:pPr>
             <a:r>
@@ -9392,7 +9622,7 @@
           <a:bodyPr wrap="square" lIns="0" tIns="0" rIns="0" bIns="0" rtlCol="0" anchor="ctr"/>
           <a:lstStyle/>
           <a:p>
-            <a:pPr algn="ctr" indent="0" marL="0">
+            <a:pPr marL="0" indent="0" algn="ctr">
               <a:buNone/>
             </a:pPr>
             <a:r>
@@ -9426,6 +9656,7 @@
         <a:solidFill>
           <a:srgbClr val="F5F6F8"/>
         </a:solidFill>
+        <a:effectLst/>
       </p:bgPr>
     </p:bg>
     <p:spTree>
@@ -9463,7 +9694,7 @@
           <a:bodyPr wrap="square" lIns="0" tIns="0" rIns="0" bIns="0" rtlCol="0" anchor="t"/>
           <a:lstStyle/>
           <a:p>
-            <a:pPr indent="0" marL="0">
+            <a:pPr marL="0" indent="0">
               <a:buNone/>
             </a:pPr>
             <a:r>
@@ -9507,13 +9738,20 @@
             <a:prstDash val="solid"/>
           </a:ln>
           <a:effectLst>
-            <a:outerShdw sx="100000" sy="100000" kx="0" ky="0" algn="bl" rotWithShape="0" blurRad="76200" dist="25400" dir="5400000">
+            <a:outerShdw blurRad="76200" dist="25400" dir="5400000" algn="bl" rotWithShape="0">
               <a:srgbClr val="000000">
                 <a:alpha val="12000"/>
               </a:srgbClr>
             </a:outerShdw>
           </a:effectLst>
         </p:spPr>
+        <p:txBody>
+          <a:bodyPr/>
+          <a:lstStyle/>
+          <a:p>
+            <a:endParaRPr lang="ko-KR" altLang="en-US"/>
+          </a:p>
+        </p:txBody>
       </p:sp>
       <p:sp>
         <p:nvSpPr>
@@ -9536,7 +9774,7 @@
           <a:bodyPr wrap="square" lIns="0" tIns="0" rIns="0" bIns="0" rtlCol="0" anchor="t"/>
           <a:lstStyle/>
           <a:p>
-            <a:pPr indent="0" marL="0">
+            <a:pPr marL="0" indent="0">
               <a:spcAft>
                 <a:spcPts val="400"/>
               </a:spcAft>
@@ -9556,7 +9794,7 @@
             <a:endParaRPr lang="en-US" sz="1400" dirty="0"/>
           </a:p>
           <a:p>
-            <a:pPr indent="0" marL="0">
+            <a:pPr marL="0" indent="0">
               <a:spcAft>
                 <a:spcPts val="400"/>
               </a:spcAft>
@@ -9603,13 +9841,20 @@
             <a:prstDash val="solid"/>
           </a:ln>
           <a:effectLst>
-            <a:outerShdw sx="100000" sy="100000" kx="0" ky="0" algn="bl" rotWithShape="0" blurRad="76200" dist="25400" dir="5400000">
+            <a:outerShdw blurRad="76200" dist="25400" dir="5400000" algn="bl" rotWithShape="0">
               <a:srgbClr val="000000">
                 <a:alpha val="12000"/>
               </a:srgbClr>
             </a:outerShdw>
           </a:effectLst>
         </p:spPr>
+        <p:txBody>
+          <a:bodyPr/>
+          <a:lstStyle/>
+          <a:p>
+            <a:endParaRPr lang="ko-KR" altLang="en-US"/>
+          </a:p>
+        </p:txBody>
       </p:sp>
       <p:sp>
         <p:nvSpPr>
@@ -9632,7 +9877,7 @@
           <a:bodyPr wrap="square" lIns="0" tIns="0" rIns="0" bIns="0" rtlCol="0" anchor="t"/>
           <a:lstStyle/>
           <a:p>
-            <a:pPr indent="0" marL="0">
+            <a:pPr marL="0" indent="0">
               <a:spcAft>
                 <a:spcPts val="400"/>
               </a:spcAft>
@@ -9652,7 +9897,7 @@
             <a:endParaRPr lang="en-US" sz="1400" dirty="0"/>
           </a:p>
           <a:p>
-            <a:pPr indent="0" marL="0">
+            <a:pPr marL="0" indent="0">
               <a:spcAft>
                 <a:spcPts val="400"/>
               </a:spcAft>
@@ -9699,13 +9944,20 @@
             <a:prstDash val="solid"/>
           </a:ln>
           <a:effectLst>
-            <a:outerShdw sx="100000" sy="100000" kx="0" ky="0" algn="bl" rotWithShape="0" blurRad="76200" dist="25400" dir="5400000">
+            <a:outerShdw blurRad="76200" dist="25400" dir="5400000" algn="bl" rotWithShape="0">
               <a:srgbClr val="000000">
                 <a:alpha val="12000"/>
               </a:srgbClr>
             </a:outerShdw>
           </a:effectLst>
         </p:spPr>
+        <p:txBody>
+          <a:bodyPr/>
+          <a:lstStyle/>
+          <a:p>
+            <a:endParaRPr lang="ko-KR" altLang="en-US"/>
+          </a:p>
+        </p:txBody>
       </p:sp>
       <p:sp>
         <p:nvSpPr>
@@ -9728,7 +9980,7 @@
           <a:bodyPr wrap="square" lIns="0" tIns="0" rIns="0" bIns="0" rtlCol="0" anchor="t"/>
           <a:lstStyle/>
           <a:p>
-            <a:pPr indent="0" marL="0">
+            <a:pPr marL="0" indent="0">
               <a:spcAft>
                 <a:spcPts val="400"/>
               </a:spcAft>
@@ -9748,7 +10000,7 @@
             <a:endParaRPr lang="en-US" sz="1400" dirty="0"/>
           </a:p>
           <a:p>
-            <a:pPr indent="0" marL="0">
+            <a:pPr marL="0" indent="0">
               <a:spcAft>
                 <a:spcPts val="400"/>
               </a:spcAft>
@@ -9795,6 +10047,13 @@
             <a:prstDash val="solid"/>
           </a:ln>
         </p:spPr>
+        <p:txBody>
+          <a:bodyPr/>
+          <a:lstStyle/>
+          <a:p>
+            <a:endParaRPr lang="ko-KR" altLang="en-US"/>
+          </a:p>
+        </p:txBody>
       </p:sp>
       <p:sp>
         <p:nvSpPr>
@@ -9817,7 +10076,7 @@
           <a:bodyPr wrap="square" lIns="0" tIns="0" rIns="0" bIns="0" rtlCol="0" anchor="t"/>
           <a:lstStyle/>
           <a:p>
-            <a:pPr indent="0" marL="0">
+            <a:pPr marL="0" indent="0">
               <a:spcAft>
                 <a:spcPts val="400"/>
               </a:spcAft>
@@ -9837,7 +10096,7 @@
             <a:endParaRPr lang="en-US" sz="1400" dirty="0"/>
           </a:p>
           <a:p>
-            <a:pPr indent="0" marL="0">
+            <a:pPr marL="0" indent="0">
               <a:spcAft>
                 <a:spcPts val="400"/>
               </a:spcAft>
@@ -9884,6 +10143,13 @@
             <a:prstDash val="solid"/>
           </a:ln>
         </p:spPr>
+        <p:txBody>
+          <a:bodyPr/>
+          <a:lstStyle/>
+          <a:p>
+            <a:endParaRPr lang="ko-KR" altLang="en-US"/>
+          </a:p>
+        </p:txBody>
       </p:sp>
       <p:sp>
         <p:nvSpPr>
@@ -9906,7 +10172,7 @@
           <a:bodyPr wrap="square" lIns="0" tIns="0" rIns="0" bIns="0" rtlCol="0" anchor="t"/>
           <a:lstStyle/>
           <a:p>
-            <a:pPr indent="0" marL="0">
+            <a:pPr marL="0" indent="0">
               <a:buNone/>
             </a:pPr>
             <a:r>
@@ -9920,9 +10186,6 @@
               </a:rPr>
               <a:t>계기: </a:t>
             </a:r>
-            <a:pPr indent="0" marL="0">
-              <a:buNone/>
-            </a:pPr>
             <a:r>
               <a:rPr lang="en-US" sz="1600" dirty="0">
                 <a:solidFill>
@@ -10239,4 +10502,319 @@
     </a:ext>
   </a:extLst>
 </a:theme>
+</file>
+
+<file path=ppt/theme/theme2.xml><?xml version="1.0" encoding="utf-8"?>
+<a:theme xmlns:a="http://schemas.openxmlformats.org/drawingml/2006/main" name="Office 테마">
+  <a:themeElements>
+    <a:clrScheme name="Office">
+      <a:dk1>
+        <a:sysClr val="windowText" lastClr="000000"/>
+      </a:dk1>
+      <a:lt1>
+        <a:sysClr val="window" lastClr="FFFFFF"/>
+      </a:lt1>
+      <a:dk2>
+        <a:srgbClr val="0E2841"/>
+      </a:dk2>
+      <a:lt2>
+        <a:srgbClr val="E8E8E8"/>
+      </a:lt2>
+      <a:accent1>
+        <a:srgbClr val="156082"/>
+      </a:accent1>
+      <a:accent2>
+        <a:srgbClr val="E97132"/>
+      </a:accent2>
+      <a:accent3>
+        <a:srgbClr val="196B24"/>
+      </a:accent3>
+      <a:accent4>
+        <a:srgbClr val="0F9ED5"/>
+      </a:accent4>
+      <a:accent5>
+        <a:srgbClr val="A02B93"/>
+      </a:accent5>
+      <a:accent6>
+        <a:srgbClr val="4EA72E"/>
+      </a:accent6>
+      <a:hlink>
+        <a:srgbClr val="467886"/>
+      </a:hlink>
+      <a:folHlink>
+        <a:srgbClr val="96607D"/>
+      </a:folHlink>
+    </a:clrScheme>
+    <a:fontScheme name="Office">
+      <a:majorFont>
+        <a:latin typeface="맑은 고딕" panose="02110004020202020204"/>
+        <a:ea typeface=""/>
+        <a:cs typeface=""/>
+        <a:font script="Jpan" typeface="游ゴシック Light"/>
+        <a:font script="Hang" typeface="맑은 고딕"/>
+        <a:font script="Hans" typeface="等线 Light"/>
+        <a:font script="Hant" typeface="新細明體"/>
+        <a:font script="Arab" typeface="Times New Roman"/>
+        <a:font script="Hebr" typeface="Times New Roman"/>
+        <a:font script="Thai" typeface="Angsana New"/>
+        <a:font script="Ethi" typeface="Nyala"/>
+        <a:font script="Beng" typeface="Vrinda"/>
+        <a:font script="Gujr" typeface="Shruti"/>
+        <a:font script="Khmr" typeface="MoolBoran"/>
+        <a:font script="Knda" typeface="Tunga"/>
+        <a:font script="Guru" typeface="Raavi"/>
+        <a:font script="Cans" typeface="Euphemia"/>
+        <a:font script="Cher" typeface="Plantagenet Cherokee"/>
+        <a:font script="Yiii" typeface="Microsoft Yi Baiti"/>
+        <a:font script="Tibt" typeface="Microsoft Himalaya"/>
+        <a:font script="Thaa" typeface="MV Boli"/>
+        <a:font script="Deva" typeface="Mangal"/>
+        <a:font script="Telu" typeface="Gautami"/>
+        <a:font script="Taml" typeface="Latha"/>
+        <a:font script="Syrc" typeface="Estrangelo Edessa"/>
+        <a:font script="Orya" typeface="Kalinga"/>
+        <a:font script="Mlym" typeface="Kartika"/>
+        <a:font script="Laoo" typeface="DokChampa"/>
+        <a:font script="Sinh" typeface="Iskoola Pota"/>
+        <a:font script="Mong" typeface="Mongolian Baiti"/>
+        <a:font script="Viet" typeface="Times New Roman"/>
+        <a:font script="Uigh" typeface="Microsoft Uighur"/>
+        <a:font script="Geor" typeface="Sylfaen"/>
+        <a:font script="Armn" typeface="Arial"/>
+        <a:font script="Bugi" typeface="Leelawadee UI"/>
+        <a:font script="Bopo" typeface="Microsoft JhengHei"/>
+        <a:font script="Java" typeface="Javanese Text"/>
+        <a:font script="Lisu" typeface="Segoe UI"/>
+        <a:font script="Mymr" typeface="Myanmar Text"/>
+        <a:font script="Nkoo" typeface="Ebrima"/>
+        <a:font script="Olck" typeface="Nirmala UI"/>
+        <a:font script="Osma" typeface="Ebrima"/>
+        <a:font script="Phag" typeface="Phagspa"/>
+        <a:font script="Syrn" typeface="Estrangelo Edessa"/>
+        <a:font script="Syrj" typeface="Estrangelo Edessa"/>
+        <a:font script="Syre" typeface="Estrangelo Edessa"/>
+        <a:font script="Sora" typeface="Nirmala UI"/>
+        <a:font script="Tale" typeface="Microsoft Tai Le"/>
+        <a:font script="Talu" typeface="Microsoft New Tai Lue"/>
+        <a:font script="Tfng" typeface="Ebrima"/>
+      </a:majorFont>
+      <a:minorFont>
+        <a:latin typeface="맑은 고딕" panose="02110004020202020204"/>
+        <a:ea typeface=""/>
+        <a:cs typeface=""/>
+        <a:font script="Jpan" typeface="游ゴシック"/>
+        <a:font script="Hang" typeface="맑은 고딕"/>
+        <a:font script="Hans" typeface="等线"/>
+        <a:font script="Hant" typeface="新細明體"/>
+        <a:font script="Arab" typeface="Arial"/>
+        <a:font script="Hebr" typeface="Arial"/>
+        <a:font script="Thai" typeface="Cordia New"/>
+        <a:font script="Ethi" typeface="Nyala"/>
+        <a:font script="Beng" typeface="Vrinda"/>
+        <a:font script="Gujr" typeface="Shruti"/>
+        <a:font script="Khmr" typeface="DaunPenh"/>
+        <a:font script="Knda" typeface="Tunga"/>
+        <a:font script="Guru" typeface="Raavi"/>
+        <a:font script="Cans" typeface="Euphemia"/>
+        <a:font script="Cher" typeface="Plantagenet Cherokee"/>
+        <a:font script="Yiii" typeface="Microsoft Yi Baiti"/>
+        <a:font script="Tibt" typeface="Microsoft Himalaya"/>
+        <a:font script="Thaa" typeface="MV Boli"/>
+        <a:font script="Deva" typeface="Mangal"/>
+        <a:font script="Telu" typeface="Gautami"/>
+        <a:font script="Taml" typeface="Latha"/>
+        <a:font script="Syrc" typeface="Estrangelo Edessa"/>
+        <a:font script="Orya" typeface="Kalinga"/>
+        <a:font script="Mlym" typeface="Kartika"/>
+        <a:font script="Laoo" typeface="DokChampa"/>
+        <a:font script="Sinh" typeface="Iskoola Pota"/>
+        <a:font script="Mong" typeface="Mongolian Baiti"/>
+        <a:font script="Viet" typeface="Arial"/>
+        <a:font script="Uigh" typeface="Microsoft Uighur"/>
+        <a:font script="Geor" typeface="Sylfaen"/>
+        <a:font script="Armn" typeface="Arial"/>
+        <a:font script="Bugi" typeface="Leelawadee UI"/>
+        <a:font script="Bopo" typeface="Microsoft JhengHei"/>
+        <a:font script="Java" typeface="Javanese Text"/>
+        <a:font script="Lisu" typeface="Segoe UI"/>
+        <a:font script="Mymr" typeface="Myanmar Text"/>
+        <a:font script="Nkoo" typeface="Ebrima"/>
+        <a:font script="Olck" typeface="Nirmala UI"/>
+        <a:font script="Osma" typeface="Ebrima"/>
+        <a:font script="Phag" typeface="Phagspa"/>
+        <a:font script="Syrn" typeface="Estrangelo Edessa"/>
+        <a:font script="Syrj" typeface="Estrangelo Edessa"/>
+        <a:font script="Syre" typeface="Estrangelo Edessa"/>
+        <a:font script="Sora" typeface="Nirmala UI"/>
+        <a:font script="Tale" typeface="Microsoft Tai Le"/>
+        <a:font script="Talu" typeface="Microsoft New Tai Lue"/>
+        <a:font script="Tfng" typeface="Ebrima"/>
+      </a:minorFont>
+    </a:fontScheme>
+    <a:fmtScheme name="Office">
+      <a:fillStyleLst>
+        <a:solidFill>
+          <a:schemeClr val="phClr"/>
+        </a:solidFill>
+        <a:gradFill rotWithShape="1">
+          <a:gsLst>
+            <a:gs pos="0">
+              <a:schemeClr val="phClr">
+                <a:lumMod val="110000"/>
+                <a:satMod val="105000"/>
+                <a:tint val="67000"/>
+              </a:schemeClr>
+            </a:gs>
+            <a:gs pos="50000">
+              <a:schemeClr val="phClr">
+                <a:lumMod val="105000"/>
+                <a:satMod val="103000"/>
+                <a:tint val="73000"/>
+              </a:schemeClr>
+            </a:gs>
+            <a:gs pos="100000">
+              <a:schemeClr val="phClr">
+                <a:lumMod val="105000"/>
+                <a:satMod val="109000"/>
+                <a:tint val="81000"/>
+              </a:schemeClr>
+            </a:gs>
+          </a:gsLst>
+          <a:lin ang="5400000" scaled="0"/>
+        </a:gradFill>
+        <a:gradFill rotWithShape="1">
+          <a:gsLst>
+            <a:gs pos="0">
+              <a:schemeClr val="phClr">
+                <a:satMod val="103000"/>
+                <a:lumMod val="102000"/>
+                <a:tint val="94000"/>
+              </a:schemeClr>
+            </a:gs>
+            <a:gs pos="50000">
+              <a:schemeClr val="phClr">
+                <a:satMod val="110000"/>
+                <a:lumMod val="100000"/>
+                <a:shade val="100000"/>
+              </a:schemeClr>
+            </a:gs>
+            <a:gs pos="100000">
+              <a:schemeClr val="phClr">
+                <a:lumMod val="99000"/>
+                <a:satMod val="120000"/>
+                <a:shade val="78000"/>
+              </a:schemeClr>
+            </a:gs>
+          </a:gsLst>
+          <a:lin ang="5400000" scaled="0"/>
+        </a:gradFill>
+      </a:fillStyleLst>
+      <a:lnStyleLst>
+        <a:ln w="12700" cap="flat" cmpd="sng" algn="ctr">
+          <a:solidFill>
+            <a:schemeClr val="phClr"/>
+          </a:solidFill>
+          <a:prstDash val="solid"/>
+          <a:miter lim="800000"/>
+        </a:ln>
+        <a:ln w="19050" cap="flat" cmpd="sng" algn="ctr">
+          <a:solidFill>
+            <a:schemeClr val="phClr"/>
+          </a:solidFill>
+          <a:prstDash val="solid"/>
+          <a:miter lim="800000"/>
+        </a:ln>
+        <a:ln w="25400" cap="flat" cmpd="sng" algn="ctr">
+          <a:solidFill>
+            <a:schemeClr val="phClr"/>
+          </a:solidFill>
+          <a:prstDash val="solid"/>
+          <a:miter lim="800000"/>
+        </a:ln>
+      </a:lnStyleLst>
+      <a:effectStyleLst>
+        <a:effectStyle>
+          <a:effectLst/>
+        </a:effectStyle>
+        <a:effectStyle>
+          <a:effectLst/>
+        </a:effectStyle>
+        <a:effectStyle>
+          <a:effectLst>
+            <a:outerShdw blurRad="57150" dist="19050" dir="5400000" algn="ctr" rotWithShape="0">
+              <a:srgbClr val="000000">
+                <a:alpha val="63000"/>
+              </a:srgbClr>
+            </a:outerShdw>
+          </a:effectLst>
+        </a:effectStyle>
+      </a:effectStyleLst>
+      <a:bgFillStyleLst>
+        <a:solidFill>
+          <a:schemeClr val="phClr"/>
+        </a:solidFill>
+        <a:solidFill>
+          <a:schemeClr val="phClr">
+            <a:tint val="95000"/>
+            <a:satMod val="170000"/>
+          </a:schemeClr>
+        </a:solidFill>
+        <a:gradFill rotWithShape="1">
+          <a:gsLst>
+            <a:gs pos="0">
+              <a:schemeClr val="phClr">
+                <a:tint val="93000"/>
+                <a:satMod val="150000"/>
+                <a:shade val="98000"/>
+                <a:lumMod val="102000"/>
+              </a:schemeClr>
+            </a:gs>
+            <a:gs pos="50000">
+              <a:schemeClr val="phClr">
+                <a:tint val="98000"/>
+                <a:satMod val="130000"/>
+                <a:shade val="90000"/>
+                <a:lumMod val="103000"/>
+              </a:schemeClr>
+            </a:gs>
+            <a:gs pos="100000">
+              <a:schemeClr val="phClr">
+                <a:shade val="63000"/>
+                <a:satMod val="120000"/>
+              </a:schemeClr>
+            </a:gs>
+          </a:gsLst>
+          <a:lin ang="5400000" scaled="0"/>
+        </a:gradFill>
+      </a:bgFillStyleLst>
+    </a:fmtScheme>
+  </a:themeElements>
+  <a:objectDefaults>
+    <a:lnDef>
+      <a:spPr/>
+      <a:bodyPr/>
+      <a:lstStyle/>
+      <a:style>
+        <a:lnRef idx="2">
+          <a:schemeClr val="accent1"/>
+        </a:lnRef>
+        <a:fillRef idx="0">
+          <a:schemeClr val="accent1"/>
+        </a:fillRef>
+        <a:effectRef idx="1">
+          <a:schemeClr val="accent1"/>
+        </a:effectRef>
+        <a:fontRef idx="minor">
+          <a:schemeClr val="tx1"/>
+        </a:fontRef>
+      </a:style>
+    </a:lnDef>
+  </a:objectDefaults>
+  <a:extraClrSchemeLst/>
+  <a:extLst>
+    <a:ext uri="{05A4C25C-085E-4340-85A3-A5531E510DB2}">
+      <thm15:themeFamily xmlns:thm15="http://schemas.microsoft.com/office/thememl/2012/main" name="Office Theme" id="{2E142A2C-CD16-42D6-873A-C26D2A0506FA}" vid="{1BDDFF52-6CD6-40A5-AB3C-68EB2F1E4D0A}"/>
+    </a:ext>
+  </a:extLst>
+</a:theme>
 </file>